--- a/ManakMitra_SIH2026_v4.pptx
+++ b/ManakMitra_SIH2026_v4.pptx
@@ -1,19 +1,19 @@
 
 <file path=ppt/presentation.xml><?xml version="1.0" encoding="utf-8"?>
-<p:presentation xmlns:a="http://schemas.openxmlformats.org/drawingml/2006/main" xmlns:r="http://schemas.openxmlformats.org/officeDocument/2006/relationships" xmlns:p="http://schemas.openxmlformats.org/presentationml/2006/main" saveSubsetFonts="1" autoCompressPictures="0">
+<p:presentation xmlns:a="http://schemas.openxmlformats.org/drawingml/2006/main" xmlns:r="http://schemas.openxmlformats.org/officeDocument/2006/relationships" xmlns:p="http://schemas.openxmlformats.org/presentationml/2006/main" autoCompressPictures="0">
   <p:sldMasterIdLst>
     <p:sldMasterId id="2147483648" r:id="rId1"/>
   </p:sldMasterIdLst>
   <p:sldIdLst>
-    <p:sldId id="256" r:id="rId7"/>
-    <p:sldId id="257" r:id="rId8"/>
-    <p:sldId id="258" r:id="rId9"/>
-    <p:sldId id="259" r:id="rId10"/>
-    <p:sldId id="260" r:id="rId11"/>
-    <p:sldId id="261" r:id="rId12"/>
-    <p:sldId id="262" r:id="rId13"/>
+    <p:sldId id="256" r:id="rId3"/>
+    <p:sldId id="257" r:id="rId4"/>
+    <p:sldId id="258" r:id="rId5"/>
+    <p:sldId id="259" r:id="rId6"/>
+    <p:sldId id="260" r:id="rId7"/>
+    <p:sldId id="261" r:id="rId8"/>
+    <p:sldId id="262" r:id="rId9"/>
   </p:sldIdLst>
-  <p:sldSz cx="12188952" cy="6858000" type="screen4x3"/>
+  <p:sldSz cx="12188825" cy="6858000" type="screen4x3"/>
   <p:notesSz cx="6858000" cy="9144000"/>
   <p:defaultTextStyle>
     <a:defPPr>
@@ -110,6 +110,22 @@
       </a:defRPr>
     </a:lvl9pPr>
   </p:defaultTextStyle>
+  <p:extLst>
+    <p:ext uri="{EFAFB233-063F-42B5-8137-9DF3F51BA10A}">
+      <p15:sldGuideLst xmlns:p15="http://schemas.microsoft.com/office/powerpoint/2012/main">
+        <p15:guide id="1" orient="horz" pos="2160" userDrawn="1">
+          <p15:clr>
+            <a:srgbClr val="A4A3A4"/>
+          </p15:clr>
+        </p15:guide>
+        <p15:guide id="2" pos="2880" userDrawn="1">
+          <p15:clr>
+            <a:srgbClr val="A4A3A4"/>
+          </p15:clr>
+        </p15:guide>
+      </p15:sldGuideLst>
+    </p:ext>
+  </p:extLst>
 </p:presentation>
 </file>
 
@@ -294,7 +310,6 @@
           <a:p>
             <a:fld id="{5BCAD085-E8A6-8845-BD4E-CB4CCA059FC4}" type="datetimeFigureOut">
               <a:rPr lang="en-US" smtClean="0"/>
-              <a:t>1/27/13</a:t>
             </a:fld>
             <a:endParaRPr lang="en-US"/>
           </a:p>
@@ -336,18 +351,12 @@
           <a:p>
             <a:fld id="{C1FF6DA9-008F-8B48-92A6-B652298478BF}" type="slidenum">
               <a:rPr lang="en-US" smtClean="0"/>
-              <a:t>‹#›</a:t>
             </a:fld>
             <a:endParaRPr lang="en-US"/>
           </a:p>
         </p:txBody>
       </p:sp>
     </p:spTree>
-    <p:extLst>
-      <p:ext uri="{BB962C8B-B14F-4D97-AF65-F5344CB8AC3E}">
-        <p14:creationId xmlns:p14="http://schemas.microsoft.com/office/powerpoint/2010/main" val="3168075583"/>
-      </p:ext>
-    </p:extLst>
   </p:cSld>
   <p:clrMapOvr>
     <a:masterClrMapping/>
@@ -415,6 +424,7 @@
               <a:rPr lang="en-US" smtClean="0"/>
               <a:t>Click to edit Master text styles</a:t>
             </a:r>
+            <a:endParaRPr lang="en-US" smtClean="0"/>
           </a:p>
           <a:p>
             <a:pPr lvl="1"/>
@@ -422,6 +432,7 @@
               <a:rPr lang="en-US" smtClean="0"/>
               <a:t>Second level</a:t>
             </a:r>
+            <a:endParaRPr lang="en-US" smtClean="0"/>
           </a:p>
           <a:p>
             <a:pPr lvl="2"/>
@@ -429,6 +440,7 @@
               <a:rPr lang="en-US" smtClean="0"/>
               <a:t>Third level</a:t>
             </a:r>
+            <a:endParaRPr lang="en-US" smtClean="0"/>
           </a:p>
           <a:p>
             <a:pPr lvl="3"/>
@@ -436,6 +448,7 @@
               <a:rPr lang="en-US" smtClean="0"/>
               <a:t>Fourth level</a:t>
             </a:r>
+            <a:endParaRPr lang="en-US" smtClean="0"/>
           </a:p>
           <a:p>
             <a:pPr lvl="4"/>
@@ -464,7 +477,6 @@
           <a:p>
             <a:fld id="{5BCAD085-E8A6-8845-BD4E-CB4CCA059FC4}" type="datetimeFigureOut">
               <a:rPr lang="en-US" smtClean="0"/>
-              <a:t>1/27/13</a:t>
             </a:fld>
             <a:endParaRPr lang="en-US"/>
           </a:p>
@@ -506,18 +518,12 @@
           <a:p>
             <a:fld id="{C1FF6DA9-008F-8B48-92A6-B652298478BF}" type="slidenum">
               <a:rPr lang="en-US" smtClean="0"/>
-              <a:t>‹#›</a:t>
             </a:fld>
             <a:endParaRPr lang="en-US"/>
           </a:p>
         </p:txBody>
       </p:sp>
     </p:spTree>
-    <p:extLst>
-      <p:ext uri="{BB962C8B-B14F-4D97-AF65-F5344CB8AC3E}">
-        <p14:creationId xmlns:p14="http://schemas.microsoft.com/office/powerpoint/2010/main" val="2910927964"/>
-      </p:ext>
-    </p:extLst>
   </p:cSld>
   <p:clrMapOvr>
     <a:masterClrMapping/>
@@ -595,6 +601,7 @@
               <a:rPr lang="en-US" smtClean="0"/>
               <a:t>Click to edit Master text styles</a:t>
             </a:r>
+            <a:endParaRPr lang="en-US" smtClean="0"/>
           </a:p>
           <a:p>
             <a:pPr lvl="1"/>
@@ -602,6 +609,7 @@
               <a:rPr lang="en-US" smtClean="0"/>
               <a:t>Second level</a:t>
             </a:r>
+            <a:endParaRPr lang="en-US" smtClean="0"/>
           </a:p>
           <a:p>
             <a:pPr lvl="2"/>
@@ -609,6 +617,7 @@
               <a:rPr lang="en-US" smtClean="0"/>
               <a:t>Third level</a:t>
             </a:r>
+            <a:endParaRPr lang="en-US" smtClean="0"/>
           </a:p>
           <a:p>
             <a:pPr lvl="3"/>
@@ -616,6 +625,7 @@
               <a:rPr lang="en-US" smtClean="0"/>
               <a:t>Fourth level</a:t>
             </a:r>
+            <a:endParaRPr lang="en-US" smtClean="0"/>
           </a:p>
           <a:p>
             <a:pPr lvl="4"/>
@@ -644,7 +654,6 @@
           <a:p>
             <a:fld id="{5BCAD085-E8A6-8845-BD4E-CB4CCA059FC4}" type="datetimeFigureOut">
               <a:rPr lang="en-US" smtClean="0"/>
-              <a:t>1/27/13</a:t>
             </a:fld>
             <a:endParaRPr lang="en-US"/>
           </a:p>
@@ -686,18 +695,12 @@
           <a:p>
             <a:fld id="{C1FF6DA9-008F-8B48-92A6-B652298478BF}" type="slidenum">
               <a:rPr lang="en-US" smtClean="0"/>
-              <a:t>‹#›</a:t>
             </a:fld>
             <a:endParaRPr lang="en-US"/>
           </a:p>
         </p:txBody>
       </p:sp>
     </p:spTree>
-    <p:extLst>
-      <p:ext uri="{BB962C8B-B14F-4D97-AF65-F5344CB8AC3E}">
-        <p14:creationId xmlns:p14="http://schemas.microsoft.com/office/powerpoint/2010/main" val="3612223792"/>
-      </p:ext>
-    </p:extLst>
   </p:cSld>
   <p:clrMapOvr>
     <a:masterClrMapping/>
@@ -765,6 +768,7 @@
               <a:rPr lang="en-US" smtClean="0"/>
               <a:t>Click to edit Master text styles</a:t>
             </a:r>
+            <a:endParaRPr lang="en-US" smtClean="0"/>
           </a:p>
           <a:p>
             <a:pPr lvl="1"/>
@@ -772,6 +776,7 @@
               <a:rPr lang="en-US" smtClean="0"/>
               <a:t>Second level</a:t>
             </a:r>
+            <a:endParaRPr lang="en-US" smtClean="0"/>
           </a:p>
           <a:p>
             <a:pPr lvl="2"/>
@@ -779,6 +784,7 @@
               <a:rPr lang="en-US" smtClean="0"/>
               <a:t>Third level</a:t>
             </a:r>
+            <a:endParaRPr lang="en-US" smtClean="0"/>
           </a:p>
           <a:p>
             <a:pPr lvl="3"/>
@@ -786,6 +792,7 @@
               <a:rPr lang="en-US" smtClean="0"/>
               <a:t>Fourth level</a:t>
             </a:r>
+            <a:endParaRPr lang="en-US" smtClean="0"/>
           </a:p>
           <a:p>
             <a:pPr lvl="4"/>
@@ -814,7 +821,6 @@
           <a:p>
             <a:fld id="{5BCAD085-E8A6-8845-BD4E-CB4CCA059FC4}" type="datetimeFigureOut">
               <a:rPr lang="en-US" smtClean="0"/>
-              <a:t>1/27/13</a:t>
             </a:fld>
             <a:endParaRPr lang="en-US"/>
           </a:p>
@@ -856,18 +862,12 @@
           <a:p>
             <a:fld id="{C1FF6DA9-008F-8B48-92A6-B652298478BF}" type="slidenum">
               <a:rPr lang="en-US" smtClean="0"/>
-              <a:t>‹#›</a:t>
             </a:fld>
             <a:endParaRPr lang="en-US"/>
           </a:p>
         </p:txBody>
       </p:sp>
     </p:spTree>
-    <p:extLst>
-      <p:ext uri="{BB962C8B-B14F-4D97-AF65-F5344CB8AC3E}">
-        <p14:creationId xmlns:p14="http://schemas.microsoft.com/office/powerpoint/2010/main" val="2614314258"/>
-      </p:ext>
-    </p:extLst>
   </p:cSld>
   <p:clrMapOvr>
     <a:masterClrMapping/>
@@ -1040,6 +1040,7 @@
               <a:rPr lang="en-US" smtClean="0"/>
               <a:t>Click to edit Master text styles</a:t>
             </a:r>
+            <a:endParaRPr lang="en-US" smtClean="0"/>
           </a:p>
         </p:txBody>
       </p:sp>
@@ -1060,7 +1061,6 @@
           <a:p>
             <a:fld id="{5BCAD085-E8A6-8845-BD4E-CB4CCA059FC4}" type="datetimeFigureOut">
               <a:rPr lang="en-US" smtClean="0"/>
-              <a:t>1/27/13</a:t>
             </a:fld>
             <a:endParaRPr lang="en-US"/>
           </a:p>
@@ -1102,18 +1102,12 @@
           <a:p>
             <a:fld id="{C1FF6DA9-008F-8B48-92A6-B652298478BF}" type="slidenum">
               <a:rPr lang="en-US" smtClean="0"/>
-              <a:t>‹#›</a:t>
             </a:fld>
             <a:endParaRPr lang="en-US"/>
           </a:p>
         </p:txBody>
       </p:sp>
     </p:spTree>
-    <p:extLst>
-      <p:ext uri="{BB962C8B-B14F-4D97-AF65-F5344CB8AC3E}">
-        <p14:creationId xmlns:p14="http://schemas.microsoft.com/office/powerpoint/2010/main" val="960648375"/>
-      </p:ext>
-    </p:extLst>
   </p:cSld>
   <p:clrMapOvr>
     <a:masterClrMapping/>
@@ -1214,6 +1208,7 @@
               <a:rPr lang="en-US" smtClean="0"/>
               <a:t>Click to edit Master text styles</a:t>
             </a:r>
+            <a:endParaRPr lang="en-US" smtClean="0"/>
           </a:p>
           <a:p>
             <a:pPr lvl="1"/>
@@ -1221,6 +1216,7 @@
               <a:rPr lang="en-US" smtClean="0"/>
               <a:t>Second level</a:t>
             </a:r>
+            <a:endParaRPr lang="en-US" smtClean="0"/>
           </a:p>
           <a:p>
             <a:pPr lvl="2"/>
@@ -1228,6 +1224,7 @@
               <a:rPr lang="en-US" smtClean="0"/>
               <a:t>Third level</a:t>
             </a:r>
+            <a:endParaRPr lang="en-US" smtClean="0"/>
           </a:p>
           <a:p>
             <a:pPr lvl="3"/>
@@ -1235,6 +1232,7 @@
               <a:rPr lang="en-US" smtClean="0"/>
               <a:t>Fourth level</a:t>
             </a:r>
+            <a:endParaRPr lang="en-US" smtClean="0"/>
           </a:p>
           <a:p>
             <a:pPr lvl="4"/>
@@ -1299,6 +1297,7 @@
               <a:rPr lang="en-US" smtClean="0"/>
               <a:t>Click to edit Master text styles</a:t>
             </a:r>
+            <a:endParaRPr lang="en-US" smtClean="0"/>
           </a:p>
           <a:p>
             <a:pPr lvl="1"/>
@@ -1306,6 +1305,7 @@
               <a:rPr lang="en-US" smtClean="0"/>
               <a:t>Second level</a:t>
             </a:r>
+            <a:endParaRPr lang="en-US" smtClean="0"/>
           </a:p>
           <a:p>
             <a:pPr lvl="2"/>
@@ -1313,6 +1313,7 @@
               <a:rPr lang="en-US" smtClean="0"/>
               <a:t>Third level</a:t>
             </a:r>
+            <a:endParaRPr lang="en-US" smtClean="0"/>
           </a:p>
           <a:p>
             <a:pPr lvl="3"/>
@@ -1320,6 +1321,7 @@
               <a:rPr lang="en-US" smtClean="0"/>
               <a:t>Fourth level</a:t>
             </a:r>
+            <a:endParaRPr lang="en-US" smtClean="0"/>
           </a:p>
           <a:p>
             <a:pPr lvl="4"/>
@@ -1348,7 +1350,6 @@
           <a:p>
             <a:fld id="{5BCAD085-E8A6-8845-BD4E-CB4CCA059FC4}" type="datetimeFigureOut">
               <a:rPr lang="en-US" smtClean="0"/>
-              <a:t>1/27/13</a:t>
             </a:fld>
             <a:endParaRPr lang="en-US"/>
           </a:p>
@@ -1390,18 +1391,12 @@
           <a:p>
             <a:fld id="{C1FF6DA9-008F-8B48-92A6-B652298478BF}" type="slidenum">
               <a:rPr lang="en-US" smtClean="0"/>
-              <a:t>‹#›</a:t>
             </a:fld>
             <a:endParaRPr lang="en-US"/>
           </a:p>
         </p:txBody>
       </p:sp>
     </p:spTree>
-    <p:extLst>
-      <p:ext uri="{BB962C8B-B14F-4D97-AF65-F5344CB8AC3E}">
-        <p14:creationId xmlns:p14="http://schemas.microsoft.com/office/powerpoint/2010/main" val="2782244947"/>
-      </p:ext>
-    </p:extLst>
   </p:cSld>
   <p:clrMapOvr>
     <a:masterClrMapping/>
@@ -1515,6 +1510,7 @@
               <a:rPr lang="en-US" smtClean="0"/>
               <a:t>Click to edit Master text styles</a:t>
             </a:r>
+            <a:endParaRPr lang="en-US" smtClean="0"/>
           </a:p>
         </p:txBody>
       </p:sp>
@@ -1571,6 +1567,7 @@
               <a:rPr lang="en-US" smtClean="0"/>
               <a:t>Click to edit Master text styles</a:t>
             </a:r>
+            <a:endParaRPr lang="en-US" smtClean="0"/>
           </a:p>
           <a:p>
             <a:pPr lvl="1"/>
@@ -1578,6 +1575,7 @@
               <a:rPr lang="en-US" smtClean="0"/>
               <a:t>Second level</a:t>
             </a:r>
+            <a:endParaRPr lang="en-US" smtClean="0"/>
           </a:p>
           <a:p>
             <a:pPr lvl="2"/>
@@ -1585,6 +1583,7 @@
               <a:rPr lang="en-US" smtClean="0"/>
               <a:t>Third level</a:t>
             </a:r>
+            <a:endParaRPr lang="en-US" smtClean="0"/>
           </a:p>
           <a:p>
             <a:pPr lvl="3"/>
@@ -1592,6 +1591,7 @@
               <a:rPr lang="en-US" smtClean="0"/>
               <a:t>Fourth level</a:t>
             </a:r>
+            <a:endParaRPr lang="en-US" smtClean="0"/>
           </a:p>
           <a:p>
             <a:pPr lvl="4"/>
@@ -1665,6 +1665,7 @@
               <a:rPr lang="en-US" smtClean="0"/>
               <a:t>Click to edit Master text styles</a:t>
             </a:r>
+            <a:endParaRPr lang="en-US" smtClean="0"/>
           </a:p>
         </p:txBody>
       </p:sp>
@@ -1721,6 +1722,7 @@
               <a:rPr lang="en-US" smtClean="0"/>
               <a:t>Click to edit Master text styles</a:t>
             </a:r>
+            <a:endParaRPr lang="en-US" smtClean="0"/>
           </a:p>
           <a:p>
             <a:pPr lvl="1"/>
@@ -1728,6 +1730,7 @@
               <a:rPr lang="en-US" smtClean="0"/>
               <a:t>Second level</a:t>
             </a:r>
+            <a:endParaRPr lang="en-US" smtClean="0"/>
           </a:p>
           <a:p>
             <a:pPr lvl="2"/>
@@ -1735,6 +1738,7 @@
               <a:rPr lang="en-US" smtClean="0"/>
               <a:t>Third level</a:t>
             </a:r>
+            <a:endParaRPr lang="en-US" smtClean="0"/>
           </a:p>
           <a:p>
             <a:pPr lvl="3"/>
@@ -1742,6 +1746,7 @@
               <a:rPr lang="en-US" smtClean="0"/>
               <a:t>Fourth level</a:t>
             </a:r>
+            <a:endParaRPr lang="en-US" smtClean="0"/>
           </a:p>
           <a:p>
             <a:pPr lvl="4"/>
@@ -1770,7 +1775,6 @@
           <a:p>
             <a:fld id="{5BCAD085-E8A6-8845-BD4E-CB4CCA059FC4}" type="datetimeFigureOut">
               <a:rPr lang="en-US" smtClean="0"/>
-              <a:t>1/27/13</a:t>
             </a:fld>
             <a:endParaRPr lang="en-US"/>
           </a:p>
@@ -1812,18 +1816,12 @@
           <a:p>
             <a:fld id="{C1FF6DA9-008F-8B48-92A6-B652298478BF}" type="slidenum">
               <a:rPr lang="en-US" smtClean="0"/>
-              <a:t>‹#›</a:t>
             </a:fld>
             <a:endParaRPr lang="en-US"/>
           </a:p>
         </p:txBody>
       </p:sp>
     </p:spTree>
-    <p:extLst>
-      <p:ext uri="{BB962C8B-B14F-4D97-AF65-F5344CB8AC3E}">
-        <p14:creationId xmlns:p14="http://schemas.microsoft.com/office/powerpoint/2010/main" val="990158736"/>
-      </p:ext>
-    </p:extLst>
   </p:cSld>
   <p:clrMapOvr>
     <a:masterClrMapping/>
@@ -1888,7 +1886,6 @@
           <a:p>
             <a:fld id="{5BCAD085-E8A6-8845-BD4E-CB4CCA059FC4}" type="datetimeFigureOut">
               <a:rPr lang="en-US" smtClean="0"/>
-              <a:t>1/27/13</a:t>
             </a:fld>
             <a:endParaRPr lang="en-US"/>
           </a:p>
@@ -1930,18 +1927,12 @@
           <a:p>
             <a:fld id="{C1FF6DA9-008F-8B48-92A6-B652298478BF}" type="slidenum">
               <a:rPr lang="en-US" smtClean="0"/>
-              <a:t>‹#›</a:t>
             </a:fld>
             <a:endParaRPr lang="en-US"/>
           </a:p>
         </p:txBody>
       </p:sp>
     </p:spTree>
-    <p:extLst>
-      <p:ext uri="{BB962C8B-B14F-4D97-AF65-F5344CB8AC3E}">
-        <p14:creationId xmlns:p14="http://schemas.microsoft.com/office/powerpoint/2010/main" val="727027711"/>
-      </p:ext>
-    </p:extLst>
   </p:cSld>
   <p:clrMapOvr>
     <a:masterClrMapping/>
@@ -1983,7 +1974,6 @@
           <a:p>
             <a:fld id="{5BCAD085-E8A6-8845-BD4E-CB4CCA059FC4}" type="datetimeFigureOut">
               <a:rPr lang="en-US" smtClean="0"/>
-              <a:t>1/27/13</a:t>
             </a:fld>
             <a:endParaRPr lang="en-US"/>
           </a:p>
@@ -2025,18 +2015,12 @@
           <a:p>
             <a:fld id="{C1FF6DA9-008F-8B48-92A6-B652298478BF}" type="slidenum">
               <a:rPr lang="en-US" smtClean="0"/>
-              <a:t>‹#›</a:t>
             </a:fld>
             <a:endParaRPr lang="en-US"/>
           </a:p>
         </p:txBody>
       </p:sp>
     </p:spTree>
-    <p:extLst>
-      <p:ext uri="{BB962C8B-B14F-4D97-AF65-F5344CB8AC3E}">
-        <p14:creationId xmlns:p14="http://schemas.microsoft.com/office/powerpoint/2010/main" val="1212999818"/>
-      </p:ext>
-    </p:extLst>
   </p:cSld>
   <p:clrMapOvr>
     <a:masterClrMapping/>
@@ -2146,6 +2130,7 @@
               <a:rPr lang="en-US" smtClean="0"/>
               <a:t>Click to edit Master text styles</a:t>
             </a:r>
+            <a:endParaRPr lang="en-US" smtClean="0"/>
           </a:p>
           <a:p>
             <a:pPr lvl="1"/>
@@ -2153,6 +2138,7 @@
               <a:rPr lang="en-US" smtClean="0"/>
               <a:t>Second level</a:t>
             </a:r>
+            <a:endParaRPr lang="en-US" smtClean="0"/>
           </a:p>
           <a:p>
             <a:pPr lvl="2"/>
@@ -2160,6 +2146,7 @@
               <a:rPr lang="en-US" smtClean="0"/>
               <a:t>Third level</a:t>
             </a:r>
+            <a:endParaRPr lang="en-US" smtClean="0"/>
           </a:p>
           <a:p>
             <a:pPr lvl="3"/>
@@ -2167,6 +2154,7 @@
               <a:rPr lang="en-US" smtClean="0"/>
               <a:t>Fourth level</a:t>
             </a:r>
+            <a:endParaRPr lang="en-US" smtClean="0"/>
           </a:p>
           <a:p>
             <a:pPr lvl="4"/>
@@ -2240,6 +2228,7 @@
               <a:rPr lang="en-US" smtClean="0"/>
               <a:t>Click to edit Master text styles</a:t>
             </a:r>
+            <a:endParaRPr lang="en-US" smtClean="0"/>
           </a:p>
         </p:txBody>
       </p:sp>
@@ -2260,7 +2249,6 @@
           <a:p>
             <a:fld id="{5BCAD085-E8A6-8845-BD4E-CB4CCA059FC4}" type="datetimeFigureOut">
               <a:rPr lang="en-US" smtClean="0"/>
-              <a:t>1/27/13</a:t>
             </a:fld>
             <a:endParaRPr lang="en-US"/>
           </a:p>
@@ -2302,18 +2290,12 @@
           <a:p>
             <a:fld id="{C1FF6DA9-008F-8B48-92A6-B652298478BF}" type="slidenum">
               <a:rPr lang="en-US" smtClean="0"/>
-              <a:t>‹#›</a:t>
             </a:fld>
             <a:endParaRPr lang="en-US"/>
           </a:p>
         </p:txBody>
       </p:sp>
     </p:spTree>
-    <p:extLst>
-      <p:ext uri="{BB962C8B-B14F-4D97-AF65-F5344CB8AC3E}">
-        <p14:creationId xmlns:p14="http://schemas.microsoft.com/office/powerpoint/2010/main" val="1840726560"/>
-      </p:ext>
-    </p:extLst>
   </p:cSld>
   <p:clrMapOvr>
     <a:masterClrMapping/>
@@ -2493,6 +2475,7 @@
               <a:rPr lang="en-US" smtClean="0"/>
               <a:t>Click to edit Master text styles</a:t>
             </a:r>
+            <a:endParaRPr lang="en-US" smtClean="0"/>
           </a:p>
         </p:txBody>
       </p:sp>
@@ -2513,7 +2496,6 @@
           <a:p>
             <a:fld id="{5BCAD085-E8A6-8845-BD4E-CB4CCA059FC4}" type="datetimeFigureOut">
               <a:rPr lang="en-US" smtClean="0"/>
-              <a:t>1/27/13</a:t>
             </a:fld>
             <a:endParaRPr lang="en-US"/>
           </a:p>
@@ -2555,18 +2537,12 @@
           <a:p>
             <a:fld id="{C1FF6DA9-008F-8B48-92A6-B652298478BF}" type="slidenum">
               <a:rPr lang="en-US" smtClean="0"/>
-              <a:t>‹#›</a:t>
             </a:fld>
             <a:endParaRPr lang="en-US"/>
           </a:p>
         </p:txBody>
       </p:sp>
     </p:spTree>
-    <p:extLst>
-      <p:ext uri="{BB962C8B-B14F-4D97-AF65-F5344CB8AC3E}">
-        <p14:creationId xmlns:p14="http://schemas.microsoft.com/office/powerpoint/2010/main" val="3889236939"/>
-      </p:ext>
-    </p:extLst>
   </p:cSld>
   <p:clrMapOvr>
     <a:masterClrMapping/>
@@ -2659,6 +2635,7 @@
               <a:rPr lang="en-US" smtClean="0"/>
               <a:t>Click to edit Master text styles</a:t>
             </a:r>
+            <a:endParaRPr lang="en-US" smtClean="0"/>
           </a:p>
           <a:p>
             <a:pPr lvl="1"/>
@@ -2666,6 +2643,7 @@
               <a:rPr lang="en-US" smtClean="0"/>
               <a:t>Second level</a:t>
             </a:r>
+            <a:endParaRPr lang="en-US" smtClean="0"/>
           </a:p>
           <a:p>
             <a:pPr lvl="2"/>
@@ -2673,6 +2651,7 @@
               <a:rPr lang="en-US" smtClean="0"/>
               <a:t>Third level</a:t>
             </a:r>
+            <a:endParaRPr lang="en-US" smtClean="0"/>
           </a:p>
           <a:p>
             <a:pPr lvl="3"/>
@@ -2680,6 +2659,7 @@
               <a:rPr lang="en-US" smtClean="0"/>
               <a:t>Fourth level</a:t>
             </a:r>
+            <a:endParaRPr lang="en-US" smtClean="0"/>
           </a:p>
           <a:p>
             <a:pPr lvl="4"/>
@@ -2726,7 +2706,6 @@
           <a:p>
             <a:fld id="{5BCAD085-E8A6-8845-BD4E-CB4CCA059FC4}" type="datetimeFigureOut">
               <a:rPr lang="en-US" smtClean="0"/>
-              <a:t>1/27/13</a:t>
             </a:fld>
             <a:endParaRPr lang="en-US"/>
           </a:p>
@@ -2804,18 +2783,12 @@
           <a:p>
             <a:fld id="{C1FF6DA9-008F-8B48-92A6-B652298478BF}" type="slidenum">
               <a:rPr lang="en-US" smtClean="0"/>
-              <a:t>‹#›</a:t>
             </a:fld>
             <a:endParaRPr lang="en-US"/>
           </a:p>
         </p:txBody>
       </p:sp>
     </p:spTree>
-    <p:extLst>
-      <p:ext uri="{BB962C8B-B14F-4D97-AF65-F5344CB8AC3E}">
-        <p14:creationId xmlns:p14="http://schemas.microsoft.com/office/powerpoint/2010/main" val="2209977519"/>
-      </p:ext>
-    </p:extLst>
   </p:cSld>
   <p:clrMap bg1="lt1" tx1="dk1" bg2="lt2" tx2="dk2" accent1="accent1" accent2="accent2" accent3="accent3" accent4="accent4" accent5="accent5" accent6="accent6" hlink="hlink" folHlink="folHlink"/>
   <p:sldLayoutIdLst>
@@ -2853,7 +2826,7 @@
         <a:spcBef>
           <a:spcPct val="20000"/>
         </a:spcBef>
-        <a:buFont typeface="Arial"/>
+        <a:buFont typeface="Arial" panose="020B0604020202020204"/>
         <a:buChar char="•"/>
         <a:defRPr sz="3200" kern="1200">
           <a:solidFill>
@@ -2868,7 +2841,7 @@
         <a:spcBef>
           <a:spcPct val="20000"/>
         </a:spcBef>
-        <a:buFont typeface="Arial"/>
+        <a:buFont typeface="Arial" panose="020B0604020202020204"/>
         <a:buChar char="–"/>
         <a:defRPr sz="2800" kern="1200">
           <a:solidFill>
@@ -2883,7 +2856,7 @@
         <a:spcBef>
           <a:spcPct val="20000"/>
         </a:spcBef>
-        <a:buFont typeface="Arial"/>
+        <a:buFont typeface="Arial" panose="020B0604020202020204"/>
         <a:buChar char="•"/>
         <a:defRPr sz="2400" kern="1200">
           <a:solidFill>
@@ -2898,7 +2871,7 @@
         <a:spcBef>
           <a:spcPct val="20000"/>
         </a:spcBef>
-        <a:buFont typeface="Arial"/>
+        <a:buFont typeface="Arial" panose="020B0604020202020204"/>
         <a:buChar char="–"/>
         <a:defRPr sz="2000" kern="1200">
           <a:solidFill>
@@ -2913,7 +2886,7 @@
         <a:spcBef>
           <a:spcPct val="20000"/>
         </a:spcBef>
-        <a:buFont typeface="Arial"/>
+        <a:buFont typeface="Arial" panose="020B0604020202020204"/>
         <a:buChar char="»"/>
         <a:defRPr sz="2000" kern="1200">
           <a:solidFill>
@@ -2928,7 +2901,7 @@
         <a:spcBef>
           <a:spcPct val="20000"/>
         </a:spcBef>
-        <a:buFont typeface="Arial"/>
+        <a:buFont typeface="Arial" panose="020B0604020202020204"/>
         <a:buChar char="•"/>
         <a:defRPr sz="2000" kern="1200">
           <a:solidFill>
@@ -2943,7 +2916,7 @@
         <a:spcBef>
           <a:spcPct val="20000"/>
         </a:spcBef>
-        <a:buFont typeface="Arial"/>
+        <a:buFont typeface="Arial" panose="020B0604020202020204"/>
         <a:buChar char="•"/>
         <a:defRPr sz="2000" kern="1200">
           <a:solidFill>
@@ -2958,7 +2931,7 @@
         <a:spcBef>
           <a:spcPct val="20000"/>
         </a:spcBef>
-        <a:buFont typeface="Arial"/>
+        <a:buFont typeface="Arial" panose="020B0604020202020204"/>
         <a:buChar char="•"/>
         <a:defRPr sz="2000" kern="1200">
           <a:solidFill>
@@ -2973,7 +2946,7 @@
         <a:spcBef>
           <a:spcPct val="20000"/>
         </a:spcBef>
-        <a:buFont typeface="Arial"/>
+        <a:buFont typeface="Arial" panose="020B0604020202020204"/>
         <a:buChar char="•"/>
         <a:defRPr sz="2000" kern="1200">
           <a:solidFill>
@@ -3085,7 +3058,7 @@
 </file>
 
 <file path=ppt/slides/slide1.xml><?xml version="1.0" encoding="utf-8"?>
-<p:sld xmlns:a="http://schemas.openxmlformats.org/drawingml/2006/main" xmlns:p="http://schemas.openxmlformats.org/presentationml/2006/main" xmlns:r="http://schemas.openxmlformats.org/officeDocument/2006/relationships">
+<p:sld xmlns:a="http://schemas.openxmlformats.org/drawingml/2006/main" xmlns:r="http://schemas.openxmlformats.org/officeDocument/2006/relationships" xmlns:p="http://schemas.openxmlformats.org/presentationml/2006/main">
   <p:cSld>
     <p:spTree>
       <p:nvGrpSpPr>
@@ -3231,6 +3204,11 @@
               </a:rPr>
               <a:t>RESONANT</a:t>
             </a:r>
+            <a:endParaRPr sz="1600" b="1">
+              <a:solidFill>
+                <a:srgbClr val="FFFFFF"/>
+              </a:solidFill>
+            </a:endParaRPr>
           </a:p>
         </p:txBody>
       </p:sp>
@@ -3273,6 +3251,11 @@
               </a:rPr>
               <a:t>MITRA</a:t>
             </a:r>
+            <a:endParaRPr sz="5200" b="1">
+              <a:solidFill>
+                <a:srgbClr val="FF6B35"/>
+              </a:solidFill>
+            </a:endParaRPr>
           </a:p>
         </p:txBody>
       </p:sp>
@@ -3351,6 +3334,11 @@
               <a:t>AI-Powered BIS Standards Compliance Assistant
 for Indian MSMEs and Manufacturers</a:t>
             </a:r>
+            <a:endParaRPr sz="1800">
+              <a:solidFill>
+                <a:srgbClr val="CCCCCC"/>
+              </a:solidFill>
+            </a:endParaRPr>
           </a:p>
         </p:txBody>
       </p:sp>
@@ -3385,6 +3373,11 @@
               </a:rPr>
               <a:t>YOUR GUIDE TO BUREAU OF INDIAN STANDARDS</a:t>
             </a:r>
+            <a:endParaRPr sz="1400" b="1">
+              <a:solidFill>
+                <a:srgbClr val="FF6B35"/>
+              </a:solidFill>
+            </a:endParaRPr>
           </a:p>
         </p:txBody>
       </p:sp>
@@ -3419,6 +3412,11 @@
               </a:rPr>
               <a:t>28</a:t>
             </a:r>
+            <a:endParaRPr sz="3200" b="1">
+              <a:solidFill>
+                <a:srgbClr val="FF6B35"/>
+              </a:solidFill>
+            </a:endParaRPr>
           </a:p>
         </p:txBody>
       </p:sp>
@@ -3453,6 +3451,11 @@
               </a:rPr>
               <a:t>IS Standards</a:t>
             </a:r>
+            <a:endParaRPr sz="1100">
+              <a:solidFill>
+                <a:srgbClr val="AAAAAA"/>
+              </a:solidFill>
+            </a:endParaRPr>
           </a:p>
         </p:txBody>
       </p:sp>
@@ -3487,6 +3490,11 @@
               </a:rPr>
               <a:t>22</a:t>
             </a:r>
+            <a:endParaRPr sz="3200" b="1">
+              <a:solidFill>
+                <a:srgbClr val="FF6B35"/>
+              </a:solidFill>
+            </a:endParaRPr>
           </a:p>
         </p:txBody>
       </p:sp>
@@ -3521,6 +3529,11 @@
               </a:rPr>
               <a:t>Languages</a:t>
             </a:r>
+            <a:endParaRPr sz="1100">
+              <a:solidFill>
+                <a:srgbClr val="AAAAAA"/>
+              </a:solidFill>
+            </a:endParaRPr>
           </a:p>
         </p:txBody>
       </p:sp>
@@ -3555,6 +3568,11 @@
               </a:rPr>
               <a:t>25+</a:t>
             </a:r>
+            <a:endParaRPr sz="3200" b="1">
+              <a:solidFill>
+                <a:srgbClr val="FF6B35"/>
+              </a:solidFill>
+            </a:endParaRPr>
           </a:p>
         </p:txBody>
       </p:sp>
@@ -3589,6 +3607,11 @@
               </a:rPr>
               <a:t>BIS Offices</a:t>
             </a:r>
+            <a:endParaRPr sz="1100">
+              <a:solidFill>
+                <a:srgbClr val="AAAAAA"/>
+              </a:solidFill>
+            </a:endParaRPr>
           </a:p>
         </p:txBody>
       </p:sp>
@@ -3623,6 +3646,11 @@
               </a:rPr>
               <a:t>5</a:t>
             </a:r>
+            <a:endParaRPr sz="3200" b="1">
+              <a:solidFill>
+                <a:srgbClr val="FF6B35"/>
+              </a:solidFill>
+            </a:endParaRPr>
           </a:p>
         </p:txBody>
       </p:sp>
@@ -3657,6 +3685,11 @@
               </a:rPr>
               <a:t>Certifications</a:t>
             </a:r>
+            <a:endParaRPr sz="1100">
+              <a:solidFill>
+                <a:srgbClr val="AAAAAA"/>
+              </a:solidFill>
+            </a:endParaRPr>
           </a:p>
         </p:txBody>
       </p:sp>
@@ -3708,6 +3741,11 @@
               </a:rPr>
               <a:t>SIH</a:t>
             </a:r>
+            <a:endParaRPr sz="1200" b="1">
+              <a:solidFill>
+                <a:srgbClr val="FFFFFF"/>
+              </a:solidFill>
+            </a:endParaRPr>
           </a:p>
         </p:txBody>
       </p:sp>
@@ -3743,6 +3781,11 @@
               <a:t>SMART INDIA
 HACKATHON 2026</a:t>
             </a:r>
+            <a:endParaRPr sz="1100" b="1">
+              <a:solidFill>
+                <a:srgbClr val="CCCCCC"/>
+              </a:solidFill>
+            </a:endParaRPr>
           </a:p>
         </p:txBody>
       </p:sp>
@@ -3755,7 +3798,7 @@
 </file>
 
 <file path=ppt/slides/slide2.xml><?xml version="1.0" encoding="utf-8"?>
-<p:sld xmlns:a="http://schemas.openxmlformats.org/drawingml/2006/main" xmlns:p="http://schemas.openxmlformats.org/presentationml/2006/main" xmlns:r="http://schemas.openxmlformats.org/officeDocument/2006/relationships">
+<p:sld xmlns:a="http://schemas.openxmlformats.org/drawingml/2006/main" xmlns:r="http://schemas.openxmlformats.org/officeDocument/2006/relationships" xmlns:p="http://schemas.openxmlformats.org/presentationml/2006/main">
   <p:cSld>
     <p:spTree>
       <p:nvGrpSpPr>
@@ -3764,6 +3807,30 @@
         <p:nvPr/>
       </p:nvGrpSpPr>
       <p:grpSpPr/>
+      <p:pic>
+        <p:nvPicPr>
+          <p:cNvPr id="64" name="Picture 63"/>
+          <p:cNvPicPr>
+            <a:picLocks noChangeAspect="1"/>
+          </p:cNvPicPr>
+          <p:nvPr/>
+        </p:nvPicPr>
+        <p:blipFill>
+          <a:blip r:embed="rId1"/>
+          <a:stretch>
+            <a:fillRect/>
+          </a:stretch>
+        </p:blipFill>
+        <p:spPr>
+          <a:xfrm>
+            <a:off x="0" y="781050"/>
+            <a:ext cx="6840855" cy="4042410"/>
+          </a:xfrm>
+          <a:prstGeom prst="rect">
+            <a:avLst/>
+          </a:prstGeom>
+        </p:spPr>
+      </p:pic>
       <p:sp>
         <p:nvSpPr>
           <p:cNvPr id="2" name="Rectangle 1"/>
@@ -3859,6 +3926,11 @@
               </a:rPr>
               <a:t>Resonant</a:t>
             </a:r>
+            <a:endParaRPr sz="1800" b="1">
+              <a:solidFill>
+                <a:srgbClr val="1A3A6E"/>
+              </a:solidFill>
+            </a:endParaRPr>
           </a:p>
         </p:txBody>
       </p:sp>
@@ -3893,6 +3965,11 @@
               </a:rPr>
               <a:t>MANAKMITRA</a:t>
             </a:r>
+            <a:endParaRPr sz="2800" b="1">
+              <a:solidFill>
+                <a:srgbClr val="1A3A6E"/>
+              </a:solidFill>
+            </a:endParaRPr>
           </a:p>
         </p:txBody>
       </p:sp>
@@ -3944,6 +4021,11 @@
               </a:rPr>
               <a:t>SIH</a:t>
             </a:r>
+            <a:endParaRPr sz="1000" b="1">
+              <a:solidFill>
+                <a:srgbClr val="FFFFFF"/>
+              </a:solidFill>
+            </a:endParaRPr>
           </a:p>
         </p:txBody>
       </p:sp>
@@ -3979,62 +4061,24 @@
               <a:t>SMART INDIA
 HACKATHON 2026</a:t>
             </a:r>
-          </a:p>
-        </p:txBody>
-      </p:sp>
-      <p:sp>
-        <p:nvSpPr>
-          <p:cNvPr id="7" name="Rectangle 6"/>
-          <p:cNvSpPr/>
-          <p:nvPr/>
-        </p:nvSpPr>
-        <p:spPr>
-          <a:xfrm>
-            <a:off x="0" y="6583680"/>
-            <a:ext cx="12188952" cy="274320"/>
-          </a:xfrm>
-          <a:prstGeom prst="rect">
-            <a:avLst/>
-          </a:prstGeom>
-          <a:solidFill>
-            <a:srgbClr val="F5F5F5"/>
-          </a:solidFill>
-          <a:ln>
-            <a:noFill/>
-          </a:ln>
-        </p:spPr>
-        <p:style>
-          <a:lnRef idx="1">
-            <a:schemeClr val="accent1"/>
-          </a:lnRef>
-          <a:fillRef idx="3">
-            <a:schemeClr val="accent1"/>
-          </a:fillRef>
-          <a:effectRef idx="2">
-            <a:schemeClr val="accent1"/>
-          </a:effectRef>
-          <a:fontRef idx="minor">
-            <a:schemeClr val="lt1"/>
-          </a:fontRef>
-        </p:style>
-        <p:txBody>
-          <a:bodyPr rtlCol="0" anchor="ctr"/>
-          <a:lstStyle/>
-          <a:p>
-            <a:pPr algn="ctr"/>
-          </a:p>
-        </p:txBody>
-      </p:sp>
-      <p:sp>
-        <p:nvSpPr>
-          <p:cNvPr id="8" name="TextBox 7"/>
+            <a:endParaRPr sz="1000" b="1">
+              <a:solidFill>
+                <a:srgbClr val="1A3A6E"/>
+              </a:solidFill>
+            </a:endParaRPr>
+          </a:p>
+        </p:txBody>
+      </p:sp>
+      <p:sp>
+        <p:nvSpPr>
+          <p:cNvPr id="9" name="TextBox 8"/>
           <p:cNvSpPr txBox="1"/>
           <p:nvPr/>
         </p:nvSpPr>
         <p:spPr>
           <a:xfrm>
-            <a:off x="457200" y="6583680"/>
-            <a:ext cx="3657600" cy="274320"/>
+            <a:off x="11430000" y="6583680"/>
+            <a:ext cx="457200" cy="274320"/>
           </a:xfrm>
           <a:prstGeom prst="rect">
             <a:avLst/>
@@ -4047,27 +4091,33 @@
           </a:bodyPr>
           <a:lstStyle/>
           <a:p>
+            <a:pPr algn="r"/>
             <a:r>
               <a:rPr sz="900">
                 <a:solidFill>
                   <a:srgbClr val="999999"/>
                 </a:solidFill>
               </a:rPr>
-              <a:t>@SIH Idea submission</a:t>
-            </a:r>
-          </a:p>
-        </p:txBody>
-      </p:sp>
-      <p:sp>
-        <p:nvSpPr>
-          <p:cNvPr id="9" name="TextBox 8"/>
+              <a:t>2</a:t>
+            </a:r>
+            <a:endParaRPr sz="900">
+              <a:solidFill>
+                <a:srgbClr val="999999"/>
+              </a:solidFill>
+            </a:endParaRPr>
+          </a:p>
+        </p:txBody>
+      </p:sp>
+      <p:sp>
+        <p:nvSpPr>
+          <p:cNvPr id="38" name="TextBox 37"/>
           <p:cNvSpPr txBox="1"/>
           <p:nvPr/>
         </p:nvSpPr>
         <p:spPr>
           <a:xfrm>
-            <a:off x="11430000" y="6583680"/>
-            <a:ext cx="457200" cy="274320"/>
+            <a:off x="6583680" y="786765"/>
+            <a:ext cx="5486400" cy="320040"/>
           </a:xfrm>
           <a:prstGeom prst="rect">
             <a:avLst/>
@@ -4080,1160 +4130,20 @@
           </a:bodyPr>
           <a:lstStyle/>
           <a:p>
-            <a:pPr algn="r"/>
-            <a:r>
-              <a:rPr sz="900">
-                <a:solidFill>
-                  <a:srgbClr val="999999"/>
-                </a:solidFill>
-              </a:rPr>
-              <a:t>2</a:t>
-            </a:r>
-          </a:p>
-        </p:txBody>
-      </p:sp>
-      <p:sp>
-        <p:nvSpPr>
-          <p:cNvPr id="10" name="TextBox 9"/>
-          <p:cNvSpPr txBox="1"/>
-          <p:nvPr/>
-        </p:nvSpPr>
-        <p:spPr>
-          <a:xfrm>
-            <a:off x="365760" y="1005840"/>
-            <a:ext cx="5486400" cy="320040"/>
-          </a:xfrm>
-          <a:prstGeom prst="rect">
-            <a:avLst/>
-          </a:prstGeom>
-          <a:noFill/>
-        </p:spPr>
-        <p:txBody>
-          <a:bodyPr wrap="none">
-            <a:spAutoFit/>
-          </a:bodyPr>
-          <a:lstStyle/>
-          <a:p>
+            <a:pPr algn="ctr"/>
             <a:r>
               <a:rPr sz="1600" b="1">
                 <a:solidFill>
                   <a:srgbClr val="1A3A6E"/>
                 </a:solidFill>
               </a:rPr>
-              <a:t>Problems Faced &amp; Their Solutions:</a:t>
-            </a:r>
-          </a:p>
-        </p:txBody>
-      </p:sp>
-      <p:sp>
-        <p:nvSpPr>
-          <p:cNvPr id="11" name="Rectangle 10"/>
-          <p:cNvSpPr/>
-          <p:nvPr/>
-        </p:nvSpPr>
-        <p:spPr>
-          <a:xfrm>
-            <a:off x="365760" y="1371600"/>
-            <a:ext cx="5303520" cy="320040"/>
-          </a:xfrm>
-          <a:prstGeom prst="rect">
-            <a:avLst/>
-          </a:prstGeom>
-          <a:solidFill>
-            <a:srgbClr val="1A3A6E"/>
-          </a:solidFill>
-          <a:ln>
-            <a:noFill/>
-          </a:ln>
-        </p:spPr>
-        <p:style>
-          <a:lnRef idx="1">
-            <a:schemeClr val="accent1"/>
-          </a:lnRef>
-          <a:fillRef idx="3">
-            <a:schemeClr val="accent1"/>
-          </a:fillRef>
-          <a:effectRef idx="2">
-            <a:schemeClr val="accent1"/>
-          </a:effectRef>
-          <a:fontRef idx="minor">
-            <a:schemeClr val="lt1"/>
-          </a:fontRef>
-        </p:style>
-        <p:txBody>
-          <a:bodyPr rtlCol="0" anchor="ctr"/>
-          <a:lstStyle/>
-          <a:p>
-            <a:pPr algn="ctr"/>
-          </a:p>
-        </p:txBody>
-      </p:sp>
-      <p:sp>
-        <p:nvSpPr>
-          <p:cNvPr id="12" name="TextBox 11"/>
-          <p:cNvSpPr txBox="1"/>
-          <p:nvPr/>
-        </p:nvSpPr>
-        <p:spPr>
-          <a:xfrm>
-            <a:off x="457200" y="1399032"/>
-            <a:ext cx="2468880" cy="274320"/>
-          </a:xfrm>
-          <a:prstGeom prst="rect">
-            <a:avLst/>
-          </a:prstGeom>
-          <a:noFill/>
-        </p:spPr>
-        <p:txBody>
-          <a:bodyPr wrap="none">
-            <a:spAutoFit/>
-          </a:bodyPr>
-          <a:lstStyle/>
-          <a:p>
-            <a:pPr algn="ctr"/>
-            <a:r>
-              <a:rPr sz="1100" b="1">
-                <a:solidFill>
-                  <a:srgbClr val="FFFFFF"/>
-                </a:solidFill>
-              </a:rPr>
-              <a:t>Problems Faced</a:t>
-            </a:r>
-          </a:p>
-        </p:txBody>
-      </p:sp>
-      <p:sp>
-        <p:nvSpPr>
-          <p:cNvPr id="13" name="TextBox 12"/>
-          <p:cNvSpPr txBox="1"/>
-          <p:nvPr/>
-        </p:nvSpPr>
-        <p:spPr>
-          <a:xfrm>
-            <a:off x="3108960" y="1399032"/>
-            <a:ext cx="2468880" cy="274320"/>
-          </a:xfrm>
-          <a:prstGeom prst="rect">
-            <a:avLst/>
-          </a:prstGeom>
-          <a:noFill/>
-        </p:spPr>
-        <p:txBody>
-          <a:bodyPr wrap="none">
-            <a:spAutoFit/>
-          </a:bodyPr>
-          <a:lstStyle/>
-          <a:p>
-            <a:pPr algn="ctr"/>
-            <a:r>
-              <a:rPr sz="1100" b="1">
-                <a:solidFill>
-                  <a:srgbClr val="FFFFFF"/>
-                </a:solidFill>
-              </a:rPr>
-              <a:t>Proposed Solutions</a:t>
-            </a:r>
-          </a:p>
-        </p:txBody>
-      </p:sp>
-      <p:sp>
-        <p:nvSpPr>
-          <p:cNvPr id="14" name="Rectangle 13"/>
-          <p:cNvSpPr/>
-          <p:nvPr/>
-        </p:nvSpPr>
-        <p:spPr>
-          <a:xfrm>
-            <a:off x="365760" y="1737360"/>
-            <a:ext cx="5303520" cy="384048"/>
-          </a:xfrm>
-          <a:prstGeom prst="rect">
-            <a:avLst/>
-          </a:prstGeom>
-          <a:solidFill>
-            <a:srgbClr val="FFFFFF"/>
-          </a:solidFill>
-          <a:ln w="6350">
-            <a:solidFill>
-              <a:srgbClr val="E0E0E0"/>
-            </a:solidFill>
-          </a:ln>
-        </p:spPr>
-        <p:style>
-          <a:lnRef idx="1">
-            <a:schemeClr val="accent1"/>
-          </a:lnRef>
-          <a:fillRef idx="3">
-            <a:schemeClr val="accent1"/>
-          </a:fillRef>
-          <a:effectRef idx="2">
-            <a:schemeClr val="accent1"/>
-          </a:effectRef>
-          <a:fontRef idx="minor">
-            <a:schemeClr val="lt1"/>
-          </a:fontRef>
-        </p:style>
-        <p:txBody>
-          <a:bodyPr rtlCol="0" anchor="ctr"/>
-          <a:lstStyle/>
-          <a:p>
-            <a:pPr algn="ctr"/>
-          </a:p>
-        </p:txBody>
-      </p:sp>
-      <p:sp>
-        <p:nvSpPr>
-          <p:cNvPr id="15" name="TextBox 14"/>
-          <p:cNvSpPr txBox="1"/>
-          <p:nvPr/>
-        </p:nvSpPr>
-        <p:spPr>
-          <a:xfrm>
-            <a:off x="457200" y="1783080"/>
-            <a:ext cx="2468880" cy="320040"/>
-          </a:xfrm>
-          <a:prstGeom prst="rect">
-            <a:avLst/>
-          </a:prstGeom>
-          <a:noFill/>
-        </p:spPr>
-        <p:txBody>
-          <a:bodyPr wrap="square">
-            <a:spAutoFit/>
-          </a:bodyPr>
-          <a:lstStyle/>
-          <a:p>
-            <a:r>
-              <a:rPr sz="950" b="1">
-                <a:solidFill>
-                  <a:srgbClr val="C0392B"/>
-                </a:solidFill>
-              </a:rPr>
-              <a:t>Complex BIS Standards</a:t>
-            </a:r>
-          </a:p>
-        </p:txBody>
-      </p:sp>
-      <p:sp>
-        <p:nvSpPr>
-          <p:cNvPr id="16" name="TextBox 15"/>
-          <p:cNvSpPr txBox="1"/>
-          <p:nvPr/>
-        </p:nvSpPr>
-        <p:spPr>
-          <a:xfrm>
-            <a:off x="3063240" y="1755648"/>
-            <a:ext cx="2560320" cy="365760"/>
-          </a:xfrm>
-          <a:prstGeom prst="rect">
-            <a:avLst/>
-          </a:prstGeom>
-          <a:noFill/>
-        </p:spPr>
-        <p:txBody>
-          <a:bodyPr wrap="square">
-            <a:spAutoFit/>
-          </a:bodyPr>
-          <a:lstStyle/>
-          <a:p>
-            <a:r>
-              <a:rPr sz="950" b="1">
-                <a:solidFill>
-                  <a:srgbClr val="1A3A6E"/>
-                </a:solidFill>
-              </a:rPr>
-              <a:t>AI-based Simplification</a:t>
-            </a:r>
-          </a:p>
-          <a:p>
-            <a:r>
-              <a:rPr sz="850">
-                <a:solidFill>
-                  <a:srgbClr val="333333"/>
-                </a:solidFill>
-              </a:rPr>
-              <a:t>Explain technical requirements in simple language</a:t>
-            </a:r>
-          </a:p>
-        </p:txBody>
-      </p:sp>
-      <p:sp>
-        <p:nvSpPr>
-          <p:cNvPr id="17" name="Rectangle 16"/>
-          <p:cNvSpPr/>
-          <p:nvPr/>
-        </p:nvSpPr>
-        <p:spPr>
-          <a:xfrm>
-            <a:off x="365760" y="2121408"/>
-            <a:ext cx="5303520" cy="384048"/>
-          </a:xfrm>
-          <a:prstGeom prst="rect">
-            <a:avLst/>
-          </a:prstGeom>
-          <a:solidFill>
-            <a:srgbClr val="F5F5F5"/>
-          </a:solidFill>
-          <a:ln w="6350">
-            <a:solidFill>
-              <a:srgbClr val="E0E0E0"/>
-            </a:solidFill>
-          </a:ln>
-        </p:spPr>
-        <p:style>
-          <a:lnRef idx="1">
-            <a:schemeClr val="accent1"/>
-          </a:lnRef>
-          <a:fillRef idx="3">
-            <a:schemeClr val="accent1"/>
-          </a:fillRef>
-          <a:effectRef idx="2">
-            <a:schemeClr val="accent1"/>
-          </a:effectRef>
-          <a:fontRef idx="minor">
-            <a:schemeClr val="lt1"/>
-          </a:fontRef>
-        </p:style>
-        <p:txBody>
-          <a:bodyPr rtlCol="0" anchor="ctr"/>
-          <a:lstStyle/>
-          <a:p>
-            <a:pPr algn="ctr"/>
-          </a:p>
-        </p:txBody>
-      </p:sp>
-      <p:sp>
-        <p:nvSpPr>
-          <p:cNvPr id="18" name="TextBox 17"/>
-          <p:cNvSpPr txBox="1"/>
-          <p:nvPr/>
-        </p:nvSpPr>
-        <p:spPr>
-          <a:xfrm>
-            <a:off x="457200" y="2167127"/>
-            <a:ext cx="2468880" cy="320040"/>
-          </a:xfrm>
-          <a:prstGeom prst="rect">
-            <a:avLst/>
-          </a:prstGeom>
-          <a:noFill/>
-        </p:spPr>
-        <p:txBody>
-          <a:bodyPr wrap="square">
-            <a:spAutoFit/>
-          </a:bodyPr>
-          <a:lstStyle/>
-          <a:p>
-            <a:r>
-              <a:rPr sz="950" b="1">
-                <a:solidFill>
-                  <a:srgbClr val="C0392B"/>
-                </a:solidFill>
-              </a:rPr>
-              <a:t>Scattered Information</a:t>
-            </a:r>
-          </a:p>
-        </p:txBody>
-      </p:sp>
-      <p:sp>
-        <p:nvSpPr>
-          <p:cNvPr id="19" name="TextBox 18"/>
-          <p:cNvSpPr txBox="1"/>
-          <p:nvPr/>
-        </p:nvSpPr>
-        <p:spPr>
-          <a:xfrm>
-            <a:off x="3063240" y="2139696"/>
-            <a:ext cx="2560320" cy="365760"/>
-          </a:xfrm>
-          <a:prstGeom prst="rect">
-            <a:avLst/>
-          </a:prstGeom>
-          <a:noFill/>
-        </p:spPr>
-        <p:txBody>
-          <a:bodyPr wrap="square">
-            <a:spAutoFit/>
-          </a:bodyPr>
-          <a:lstStyle/>
-          <a:p>
-            <a:r>
-              <a:rPr sz="950" b="1">
-                <a:solidFill>
-                  <a:srgbClr val="1A3A6E"/>
-                </a:solidFill>
-              </a:rPr>
-              <a:t>Unified Platform</a:t>
-            </a:r>
-          </a:p>
-          <a:p>
-            <a:r>
-              <a:rPr sz="850">
-                <a:solidFill>
-                  <a:srgbClr val="333333"/>
-                </a:solidFill>
-              </a:rPr>
-              <a:t>Bring standards, certification &amp; lab info together</a:t>
-            </a:r>
-          </a:p>
-        </p:txBody>
-      </p:sp>
-      <p:sp>
-        <p:nvSpPr>
-          <p:cNvPr id="20" name="Rectangle 19"/>
-          <p:cNvSpPr/>
-          <p:nvPr/>
-        </p:nvSpPr>
-        <p:spPr>
-          <a:xfrm>
-            <a:off x="365760" y="2505456"/>
-            <a:ext cx="5303520" cy="384048"/>
-          </a:xfrm>
-          <a:prstGeom prst="rect">
-            <a:avLst/>
-          </a:prstGeom>
-          <a:solidFill>
-            <a:srgbClr val="FFFFFF"/>
-          </a:solidFill>
-          <a:ln w="6350">
-            <a:solidFill>
-              <a:srgbClr val="E0E0E0"/>
-            </a:solidFill>
-          </a:ln>
-        </p:spPr>
-        <p:style>
-          <a:lnRef idx="1">
-            <a:schemeClr val="accent1"/>
-          </a:lnRef>
-          <a:fillRef idx="3">
-            <a:schemeClr val="accent1"/>
-          </a:fillRef>
-          <a:effectRef idx="2">
-            <a:schemeClr val="accent1"/>
-          </a:effectRef>
-          <a:fontRef idx="minor">
-            <a:schemeClr val="lt1"/>
-          </a:fontRef>
-        </p:style>
-        <p:txBody>
-          <a:bodyPr rtlCol="0" anchor="ctr"/>
-          <a:lstStyle/>
-          <a:p>
-            <a:pPr algn="ctr"/>
-          </a:p>
-        </p:txBody>
-      </p:sp>
-      <p:sp>
-        <p:nvSpPr>
-          <p:cNvPr id="21" name="TextBox 20"/>
-          <p:cNvSpPr txBox="1"/>
-          <p:nvPr/>
-        </p:nvSpPr>
-        <p:spPr>
-          <a:xfrm>
-            <a:off x="457200" y="2551175"/>
-            <a:ext cx="2468880" cy="320040"/>
-          </a:xfrm>
-          <a:prstGeom prst="rect">
-            <a:avLst/>
-          </a:prstGeom>
-          <a:noFill/>
-        </p:spPr>
-        <p:txBody>
-          <a:bodyPr wrap="square">
-            <a:spAutoFit/>
-          </a:bodyPr>
-          <a:lstStyle/>
-          <a:p>
-            <a:r>
-              <a:rPr sz="950" b="1">
-                <a:solidFill>
-                  <a:srgbClr val="C0392B"/>
-                </a:solidFill>
-              </a:rPr>
-              <a:t>Changing Standards</a:t>
-            </a:r>
-          </a:p>
-        </p:txBody>
-      </p:sp>
-      <p:sp>
-        <p:nvSpPr>
-          <p:cNvPr id="22" name="TextBox 21"/>
-          <p:cNvSpPr txBox="1"/>
-          <p:nvPr/>
-        </p:nvSpPr>
-        <p:spPr>
-          <a:xfrm>
-            <a:off x="3063240" y="2523744"/>
-            <a:ext cx="2560320" cy="365760"/>
-          </a:xfrm>
-          <a:prstGeom prst="rect">
-            <a:avLst/>
-          </a:prstGeom>
-          <a:noFill/>
-        </p:spPr>
-        <p:txBody>
-          <a:bodyPr wrap="square">
-            <a:spAutoFit/>
-          </a:bodyPr>
-          <a:lstStyle/>
-          <a:p>
-            <a:r>
-              <a:rPr sz="950" b="1">
-                <a:solidFill>
-                  <a:srgbClr val="1A3A6E"/>
-                </a:solidFill>
-              </a:rPr>
-              <a:t>Live Source Pipeline</a:t>
-            </a:r>
-          </a:p>
-          <a:p>
-            <a:r>
-              <a:rPr sz="850">
-                <a:solidFill>
-                  <a:srgbClr val="333333"/>
-                </a:solidFill>
-              </a:rPr>
-              <a:t>Pull info from official BIS sources automatically</a:t>
-            </a:r>
-          </a:p>
-        </p:txBody>
-      </p:sp>
-      <p:sp>
-        <p:nvSpPr>
-          <p:cNvPr id="23" name="Rectangle 22"/>
-          <p:cNvSpPr/>
-          <p:nvPr/>
-        </p:nvSpPr>
-        <p:spPr>
-          <a:xfrm>
-            <a:off x="365760" y="2889503"/>
-            <a:ext cx="5303520" cy="384048"/>
-          </a:xfrm>
-          <a:prstGeom prst="rect">
-            <a:avLst/>
-          </a:prstGeom>
-          <a:solidFill>
-            <a:srgbClr val="F5F5F5"/>
-          </a:solidFill>
-          <a:ln w="6350">
-            <a:solidFill>
-              <a:srgbClr val="E0E0E0"/>
-            </a:solidFill>
-          </a:ln>
-        </p:spPr>
-        <p:style>
-          <a:lnRef idx="1">
-            <a:schemeClr val="accent1"/>
-          </a:lnRef>
-          <a:fillRef idx="3">
-            <a:schemeClr val="accent1"/>
-          </a:fillRef>
-          <a:effectRef idx="2">
-            <a:schemeClr val="accent1"/>
-          </a:effectRef>
-          <a:fontRef idx="minor">
-            <a:schemeClr val="lt1"/>
-          </a:fontRef>
-        </p:style>
-        <p:txBody>
-          <a:bodyPr rtlCol="0" anchor="ctr"/>
-          <a:lstStyle/>
-          <a:p>
-            <a:pPr algn="ctr"/>
-          </a:p>
-        </p:txBody>
-      </p:sp>
-      <p:sp>
-        <p:nvSpPr>
-          <p:cNvPr id="24" name="TextBox 23"/>
-          <p:cNvSpPr txBox="1"/>
-          <p:nvPr/>
-        </p:nvSpPr>
-        <p:spPr>
-          <a:xfrm>
-            <a:off x="457200" y="2935223"/>
-            <a:ext cx="2468880" cy="320040"/>
-          </a:xfrm>
-          <a:prstGeom prst="rect">
-            <a:avLst/>
-          </a:prstGeom>
-          <a:noFill/>
-        </p:spPr>
-        <p:txBody>
-          <a:bodyPr wrap="square">
-            <a:spAutoFit/>
-          </a:bodyPr>
-          <a:lstStyle/>
-          <a:p>
-            <a:r>
-              <a:rPr sz="950" b="1">
-                <a:solidFill>
-                  <a:srgbClr val="C0392B"/>
-                </a:solidFill>
-              </a:rPr>
-              <a:t>Finding Testing Labs</a:t>
-            </a:r>
-          </a:p>
-        </p:txBody>
-      </p:sp>
-      <p:sp>
-        <p:nvSpPr>
-          <p:cNvPr id="25" name="TextBox 24"/>
-          <p:cNvSpPr txBox="1"/>
-          <p:nvPr/>
-        </p:nvSpPr>
-        <p:spPr>
-          <a:xfrm>
-            <a:off x="3063240" y="2907791"/>
-            <a:ext cx="2560320" cy="365760"/>
-          </a:xfrm>
-          <a:prstGeom prst="rect">
-            <a:avLst/>
-          </a:prstGeom>
-          <a:noFill/>
-        </p:spPr>
-        <p:txBody>
-          <a:bodyPr wrap="square">
-            <a:spAutoFit/>
-          </a:bodyPr>
-          <a:lstStyle/>
-          <a:p>
-            <a:r>
-              <a:rPr sz="950" b="1">
-                <a:solidFill>
-                  <a:srgbClr val="1A3A6E"/>
-                </a:solidFill>
-              </a:rPr>
-              <a:t>Lab Directory</a:t>
-            </a:r>
-          </a:p>
-          <a:p>
-            <a:r>
-              <a:rPr sz="850">
-                <a:solidFill>
-                  <a:srgbClr val="333333"/>
-                </a:solidFill>
-              </a:rPr>
-              <a:t>Location-based finder with Google Maps directions</a:t>
-            </a:r>
-          </a:p>
-        </p:txBody>
-      </p:sp>
-      <p:sp>
-        <p:nvSpPr>
-          <p:cNvPr id="26" name="Rectangle 25"/>
-          <p:cNvSpPr/>
-          <p:nvPr/>
-        </p:nvSpPr>
-        <p:spPr>
-          <a:xfrm>
-            <a:off x="365760" y="3273551"/>
-            <a:ext cx="5303520" cy="384048"/>
-          </a:xfrm>
-          <a:prstGeom prst="rect">
-            <a:avLst/>
-          </a:prstGeom>
-          <a:solidFill>
-            <a:srgbClr val="FFFFFF"/>
-          </a:solidFill>
-          <a:ln w="6350">
-            <a:solidFill>
-              <a:srgbClr val="E0E0E0"/>
-            </a:solidFill>
-          </a:ln>
-        </p:spPr>
-        <p:style>
-          <a:lnRef idx="1">
-            <a:schemeClr val="accent1"/>
-          </a:lnRef>
-          <a:fillRef idx="3">
-            <a:schemeClr val="accent1"/>
-          </a:fillRef>
-          <a:effectRef idx="2">
-            <a:schemeClr val="accent1"/>
-          </a:effectRef>
-          <a:fontRef idx="minor">
-            <a:schemeClr val="lt1"/>
-          </a:fontRef>
-        </p:style>
-        <p:txBody>
-          <a:bodyPr rtlCol="0" anchor="ctr"/>
-          <a:lstStyle/>
-          <a:p>
-            <a:pPr algn="ctr"/>
-          </a:p>
-        </p:txBody>
-      </p:sp>
-      <p:sp>
-        <p:nvSpPr>
-          <p:cNvPr id="27" name="TextBox 26"/>
-          <p:cNvSpPr txBox="1"/>
-          <p:nvPr/>
-        </p:nvSpPr>
-        <p:spPr>
-          <a:xfrm>
-            <a:off x="457200" y="3319271"/>
-            <a:ext cx="2468880" cy="320040"/>
-          </a:xfrm>
-          <a:prstGeom prst="rect">
-            <a:avLst/>
-          </a:prstGeom>
-          <a:noFill/>
-        </p:spPr>
-        <p:txBody>
-          <a:bodyPr wrap="square">
-            <a:spAutoFit/>
-          </a:bodyPr>
-          <a:lstStyle/>
-          <a:p>
-            <a:r>
-              <a:rPr sz="950" b="1">
-                <a:solidFill>
-                  <a:srgbClr val="C0392B"/>
-                </a:solidFill>
-              </a:rPr>
-              <a:t>Complex Certification</a:t>
-            </a:r>
-          </a:p>
-        </p:txBody>
-      </p:sp>
-      <p:sp>
-        <p:nvSpPr>
-          <p:cNvPr id="28" name="TextBox 27"/>
-          <p:cNvSpPr txBox="1"/>
-          <p:nvPr/>
-        </p:nvSpPr>
-        <p:spPr>
-          <a:xfrm>
-            <a:off x="3063240" y="3291839"/>
-            <a:ext cx="2560320" cy="365760"/>
-          </a:xfrm>
-          <a:prstGeom prst="rect">
-            <a:avLst/>
-          </a:prstGeom>
-          <a:noFill/>
-        </p:spPr>
-        <p:txBody>
-          <a:bodyPr wrap="square">
-            <a:spAutoFit/>
-          </a:bodyPr>
-          <a:lstStyle/>
-          <a:p>
-            <a:r>
-              <a:rPr sz="950" b="1">
-                <a:solidFill>
-                  <a:srgbClr val="1A3A6E"/>
-                </a:solidFill>
-              </a:rPr>
-              <a:t>Step-by-Step Guidance</a:t>
-            </a:r>
-          </a:p>
-          <a:p>
-            <a:r>
-              <a:rPr sz="850">
-                <a:solidFill>
-                  <a:srgbClr val="333333"/>
-                </a:solidFill>
-              </a:rPr>
-              <a:t>Clear process for ISI Mark, Hallmark &amp; Eco Mark</a:t>
-            </a:r>
-          </a:p>
-        </p:txBody>
-      </p:sp>
-      <p:sp>
-        <p:nvSpPr>
-          <p:cNvPr id="29" name="Rectangle 28"/>
-          <p:cNvSpPr/>
-          <p:nvPr/>
-        </p:nvSpPr>
-        <p:spPr>
-          <a:xfrm>
-            <a:off x="365760" y="3657599"/>
-            <a:ext cx="5303520" cy="384048"/>
-          </a:xfrm>
-          <a:prstGeom prst="rect">
-            <a:avLst/>
-          </a:prstGeom>
-          <a:solidFill>
-            <a:srgbClr val="F5F5F5"/>
-          </a:solidFill>
-          <a:ln w="6350">
-            <a:solidFill>
-              <a:srgbClr val="E0E0E0"/>
-            </a:solidFill>
-          </a:ln>
-        </p:spPr>
-        <p:style>
-          <a:lnRef idx="1">
-            <a:schemeClr val="accent1"/>
-          </a:lnRef>
-          <a:fillRef idx="3">
-            <a:schemeClr val="accent1"/>
-          </a:fillRef>
-          <a:effectRef idx="2">
-            <a:schemeClr val="accent1"/>
-          </a:effectRef>
-          <a:fontRef idx="minor">
-            <a:schemeClr val="lt1"/>
-          </a:fontRef>
-        </p:style>
-        <p:txBody>
-          <a:bodyPr rtlCol="0" anchor="ctr"/>
-          <a:lstStyle/>
-          <a:p>
-            <a:pPr algn="ctr"/>
-          </a:p>
-        </p:txBody>
-      </p:sp>
-      <p:sp>
-        <p:nvSpPr>
-          <p:cNvPr id="30" name="TextBox 29"/>
-          <p:cNvSpPr txBox="1"/>
-          <p:nvPr/>
-        </p:nvSpPr>
-        <p:spPr>
-          <a:xfrm>
-            <a:off x="457200" y="3703320"/>
-            <a:ext cx="2468880" cy="320040"/>
-          </a:xfrm>
-          <a:prstGeom prst="rect">
-            <a:avLst/>
-          </a:prstGeom>
-          <a:noFill/>
-        </p:spPr>
-        <p:txBody>
-          <a:bodyPr wrap="square">
-            <a:spAutoFit/>
-          </a:bodyPr>
-          <a:lstStyle/>
-          <a:p>
-            <a:r>
-              <a:rPr sz="950" b="1">
-                <a:solidFill>
-                  <a:srgbClr val="C0392B"/>
-                </a:solidFill>
-              </a:rPr>
-              <a:t>AI Hallucinations</a:t>
-            </a:r>
-          </a:p>
-        </p:txBody>
-      </p:sp>
-      <p:sp>
-        <p:nvSpPr>
-          <p:cNvPr id="31" name="TextBox 30"/>
-          <p:cNvSpPr txBox="1"/>
-          <p:nvPr/>
-        </p:nvSpPr>
-        <p:spPr>
-          <a:xfrm>
-            <a:off x="3063240" y="3675887"/>
-            <a:ext cx="2560320" cy="365760"/>
-          </a:xfrm>
-          <a:prstGeom prst="rect">
-            <a:avLst/>
-          </a:prstGeom>
-          <a:noFill/>
-        </p:spPr>
-        <p:txBody>
-          <a:bodyPr wrap="square">
-            <a:spAutoFit/>
-          </a:bodyPr>
-          <a:lstStyle/>
-          <a:p>
-            <a:r>
-              <a:rPr sz="950" b="1">
-                <a:solidFill>
-                  <a:srgbClr val="1A3A6E"/>
-                </a:solidFill>
-              </a:rPr>
-              <a:t>Source-Grounded RAG</a:t>
-            </a:r>
-          </a:p>
-          <a:p>
-            <a:r>
-              <a:rPr sz="850">
-                <a:solidFill>
-                  <a:srgbClr val="333333"/>
-                </a:solidFill>
-              </a:rPr>
-              <a:t>Responses based on verified BIS documents only</a:t>
-            </a:r>
-          </a:p>
-        </p:txBody>
-      </p:sp>
-      <p:sp>
-        <p:nvSpPr>
-          <p:cNvPr id="32" name="Rectangle 31"/>
-          <p:cNvSpPr/>
-          <p:nvPr/>
-        </p:nvSpPr>
-        <p:spPr>
-          <a:xfrm>
-            <a:off x="365760" y="4041648"/>
-            <a:ext cx="5303520" cy="384048"/>
-          </a:xfrm>
-          <a:prstGeom prst="rect">
-            <a:avLst/>
-          </a:prstGeom>
-          <a:solidFill>
-            <a:srgbClr val="FFFFFF"/>
-          </a:solidFill>
-          <a:ln w="6350">
-            <a:solidFill>
-              <a:srgbClr val="E0E0E0"/>
-            </a:solidFill>
-          </a:ln>
-        </p:spPr>
-        <p:style>
-          <a:lnRef idx="1">
-            <a:schemeClr val="accent1"/>
-          </a:lnRef>
-          <a:fillRef idx="3">
-            <a:schemeClr val="accent1"/>
-          </a:fillRef>
-          <a:effectRef idx="2">
-            <a:schemeClr val="accent1"/>
-          </a:effectRef>
-          <a:fontRef idx="minor">
-            <a:schemeClr val="lt1"/>
-          </a:fontRef>
-        </p:style>
-        <p:txBody>
-          <a:bodyPr rtlCol="0" anchor="ctr"/>
-          <a:lstStyle/>
-          <a:p>
-            <a:pPr algn="ctr"/>
-          </a:p>
-        </p:txBody>
-      </p:sp>
-      <p:sp>
-        <p:nvSpPr>
-          <p:cNvPr id="33" name="TextBox 32"/>
-          <p:cNvSpPr txBox="1"/>
-          <p:nvPr/>
-        </p:nvSpPr>
-        <p:spPr>
-          <a:xfrm>
-            <a:off x="457200" y="4087368"/>
-            <a:ext cx="2468880" cy="320040"/>
-          </a:xfrm>
-          <a:prstGeom prst="rect">
-            <a:avLst/>
-          </a:prstGeom>
-          <a:noFill/>
-        </p:spPr>
-        <p:txBody>
-          <a:bodyPr wrap="square">
-            <a:spAutoFit/>
-          </a:bodyPr>
-          <a:lstStyle/>
-          <a:p>
-            <a:r>
-              <a:rPr sz="950" b="1">
-                <a:solidFill>
-                  <a:srgbClr val="C0392B"/>
-                </a:solidFill>
-              </a:rPr>
-              <a:t>Language Barrier</a:t>
-            </a:r>
-          </a:p>
-        </p:txBody>
-      </p:sp>
-      <p:sp>
-        <p:nvSpPr>
-          <p:cNvPr id="34" name="TextBox 33"/>
-          <p:cNvSpPr txBox="1"/>
-          <p:nvPr/>
-        </p:nvSpPr>
-        <p:spPr>
-          <a:xfrm>
-            <a:off x="3063240" y="4059935"/>
-            <a:ext cx="2560320" cy="365760"/>
-          </a:xfrm>
-          <a:prstGeom prst="rect">
-            <a:avLst/>
-          </a:prstGeom>
-          <a:noFill/>
-        </p:spPr>
-        <p:txBody>
-          <a:bodyPr wrap="square">
-            <a:spAutoFit/>
-          </a:bodyPr>
-          <a:lstStyle/>
-          <a:p>
-            <a:r>
-              <a:rPr sz="950" b="1">
-                <a:solidFill>
-                  <a:srgbClr val="1A3A6E"/>
-                </a:solidFill>
-              </a:rPr>
-              <a:t>22 Indian Languages</a:t>
-            </a:r>
-          </a:p>
-          <a:p>
-            <a:r>
-              <a:rPr sz="850">
-                <a:solidFill>
-                  <a:srgbClr val="333333"/>
-                </a:solidFill>
-              </a:rPr>
-              <a:t>Auto-detect, translate, RAG, translate back</a:t>
-            </a:r>
-          </a:p>
-        </p:txBody>
-      </p:sp>
-      <p:sp>
-        <p:nvSpPr>
-          <p:cNvPr id="35" name="Rectangle 34"/>
-          <p:cNvSpPr/>
-          <p:nvPr/>
-        </p:nvSpPr>
-        <p:spPr>
-          <a:xfrm>
-            <a:off x="365760" y="4425696"/>
-            <a:ext cx="5303520" cy="384048"/>
-          </a:xfrm>
-          <a:prstGeom prst="rect">
-            <a:avLst/>
-          </a:prstGeom>
-          <a:solidFill>
-            <a:srgbClr val="F5F5F5"/>
-          </a:solidFill>
-          <a:ln w="6350">
-            <a:solidFill>
-              <a:srgbClr val="E0E0E0"/>
-            </a:solidFill>
-          </a:ln>
-        </p:spPr>
-        <p:style>
-          <a:lnRef idx="1">
-            <a:schemeClr val="accent1"/>
-          </a:lnRef>
-          <a:fillRef idx="3">
-            <a:schemeClr val="accent1"/>
-          </a:fillRef>
-          <a:effectRef idx="2">
-            <a:schemeClr val="accent1"/>
-          </a:effectRef>
-          <a:fontRef idx="minor">
-            <a:schemeClr val="lt1"/>
-          </a:fontRef>
-        </p:style>
-        <p:txBody>
-          <a:bodyPr rtlCol="0" anchor="ctr"/>
-          <a:lstStyle/>
-          <a:p>
-            <a:pPr algn="ctr"/>
-          </a:p>
-        </p:txBody>
-      </p:sp>
-      <p:sp>
-        <p:nvSpPr>
-          <p:cNvPr id="36" name="TextBox 35"/>
-          <p:cNvSpPr txBox="1"/>
-          <p:nvPr/>
-        </p:nvSpPr>
-        <p:spPr>
-          <a:xfrm>
-            <a:off x="457200" y="4471416"/>
-            <a:ext cx="2468880" cy="320040"/>
-          </a:xfrm>
-          <a:prstGeom prst="rect">
-            <a:avLst/>
-          </a:prstGeom>
-          <a:noFill/>
-        </p:spPr>
-        <p:txBody>
-          <a:bodyPr wrap="square">
-            <a:spAutoFit/>
-          </a:bodyPr>
-          <a:lstStyle/>
-          <a:p>
-            <a:r>
-              <a:rPr sz="950" b="1">
-                <a:solidFill>
-                  <a:srgbClr val="C0392B"/>
-                </a:solidFill>
-              </a:rPr>
-              <a:t>Different User Needs</a:t>
-            </a:r>
-          </a:p>
-        </p:txBody>
-      </p:sp>
-      <p:sp>
-        <p:nvSpPr>
-          <p:cNvPr id="37" name="TextBox 36"/>
-          <p:cNvSpPr txBox="1"/>
-          <p:nvPr/>
-        </p:nvSpPr>
-        <p:spPr>
-          <a:xfrm>
-            <a:off x="3063240" y="4443983"/>
-            <a:ext cx="2560320" cy="365760"/>
-          </a:xfrm>
-          <a:prstGeom prst="rect">
-            <a:avLst/>
-          </a:prstGeom>
-          <a:noFill/>
-        </p:spPr>
-        <p:txBody>
-          <a:bodyPr wrap="square">
-            <a:spAutoFit/>
-          </a:bodyPr>
-          <a:lstStyle/>
-          <a:p>
-            <a:r>
-              <a:rPr sz="950" b="1">
-                <a:solidFill>
-                  <a:srgbClr val="1A3A6E"/>
-                </a:solidFill>
-              </a:rPr>
-              <a:t>Context-Aware AI</a:t>
-            </a:r>
-          </a:p>
-          <a:p>
-            <a:r>
-              <a:rPr sz="850">
-                <a:solidFill>
-                  <a:srgbClr val="333333"/>
-                </a:solidFill>
-              </a:rPr>
-              <a:t>Tailors guidance per user product and query</a:t>
-            </a:r>
-          </a:p>
-        </p:txBody>
-      </p:sp>
-      <p:sp>
-        <p:nvSpPr>
-          <p:cNvPr id="38" name="TextBox 37"/>
-          <p:cNvSpPr txBox="1"/>
-          <p:nvPr/>
-        </p:nvSpPr>
-        <p:spPr>
-          <a:xfrm>
-            <a:off x="6217920" y="1005840"/>
-            <a:ext cx="5486400" cy="320040"/>
-          </a:xfrm>
-          <a:prstGeom prst="rect">
-            <a:avLst/>
-          </a:prstGeom>
-          <a:noFill/>
-        </p:spPr>
-        <p:txBody>
-          <a:bodyPr wrap="none">
-            <a:spAutoFit/>
-          </a:bodyPr>
-          <a:lstStyle/>
-          <a:p>
-            <a:r>
-              <a:rPr sz="1600" b="1">
-                <a:solidFill>
-                  <a:srgbClr val="1A3A6E"/>
-                </a:solidFill>
-              </a:rPr>
               <a:t>System Architecture:</a:t>
             </a:r>
+            <a:endParaRPr sz="1600" b="1">
+              <a:solidFill>
+                <a:srgbClr val="1A3A6E"/>
+              </a:solidFill>
+            </a:endParaRPr>
           </a:p>
         </p:txBody>
       </p:sp>
@@ -5245,7 +4155,7 @@
         </p:nvSpPr>
         <p:spPr>
           <a:xfrm>
-            <a:off x="7498079" y="1417320"/>
+            <a:off x="8229599" y="1152525"/>
             <a:ext cx="2377440" cy="365760"/>
           </a:xfrm>
           <a:prstGeom prst="roundRect">
@@ -5275,7 +4185,7 @@
           </a:fontRef>
         </p:style>
         <p:txBody>
-          <a:bodyPr rtlCol="0" anchor="ctr" wrap="square" lIns="50800" rIns="50800"/>
+          <a:bodyPr wrap="square" lIns="50800" rIns="50800" rtlCol="0" anchor="ctr"/>
           <a:lstStyle/>
           <a:p>
             <a:pPr algn="ctr"/>
@@ -5287,6 +4197,11 @@
               </a:rPr>
               <a:t>User Query</a:t>
             </a:r>
+            <a:endParaRPr sz="900" b="0">
+              <a:solidFill>
+                <a:srgbClr val="333333"/>
+              </a:solidFill>
+            </a:endParaRPr>
           </a:p>
         </p:txBody>
       </p:sp>
@@ -5298,7 +4213,7 @@
         </p:nvSpPr>
         <p:spPr>
           <a:xfrm>
-            <a:off x="7498079" y="1920240"/>
+            <a:off x="8229599" y="1655445"/>
             <a:ext cx="2377440" cy="365760"/>
           </a:xfrm>
           <a:prstGeom prst="roundRect">
@@ -5328,7 +4243,7 @@
           </a:fontRef>
         </p:style>
         <p:txBody>
-          <a:bodyPr rtlCol="0" anchor="ctr" wrap="square" lIns="50800" rIns="50800"/>
+          <a:bodyPr wrap="square" lIns="50800" rIns="50800" rtlCol="0" anchor="ctr"/>
           <a:lstStyle/>
           <a:p>
             <a:pPr algn="ctr"/>
@@ -5340,6 +4255,11 @@
               </a:rPr>
               <a:t>Auto-Detect, Translate (22 Lang)</a:t>
             </a:r>
+            <a:endParaRPr sz="900" b="0">
+              <a:solidFill>
+                <a:srgbClr val="333333"/>
+              </a:solidFill>
+            </a:endParaRPr>
           </a:p>
         </p:txBody>
       </p:sp>
@@ -5351,7 +4271,7 @@
         </p:nvSpPr>
         <p:spPr>
           <a:xfrm>
-            <a:off x="7315200" y="2423160"/>
+            <a:off x="8046720" y="2158365"/>
             <a:ext cx="2743200" cy="411480"/>
           </a:xfrm>
           <a:prstGeom prst="roundRect">
@@ -5381,7 +4301,7 @@
           </a:fontRef>
         </p:style>
         <p:txBody>
-          <a:bodyPr rtlCol="0" anchor="ctr" wrap="square" lIns="50800" rIns="50800"/>
+          <a:bodyPr wrap="square" lIns="50800" rIns="50800" rtlCol="0" anchor="ctr"/>
           <a:lstStyle/>
           <a:p>
             <a:pPr algn="ctr"/>
@@ -5393,6 +4313,11 @@
               </a:rPr>
               <a:t>RAG Engine (ONNX + FAISS)</a:t>
             </a:r>
+            <a:endParaRPr sz="900" b="1">
+              <a:solidFill>
+                <a:srgbClr val="FFFFFF"/>
+              </a:solidFill>
+            </a:endParaRPr>
           </a:p>
         </p:txBody>
       </p:sp>
@@ -5404,7 +4329,7 @@
         </p:nvSpPr>
         <p:spPr>
           <a:xfrm>
-            <a:off x="6400800" y="2971800"/>
+            <a:off x="7132320" y="2707005"/>
             <a:ext cx="2011680" cy="347472"/>
           </a:xfrm>
           <a:prstGeom prst="roundRect">
@@ -5434,7 +4359,7 @@
           </a:fontRef>
         </p:style>
         <p:txBody>
-          <a:bodyPr rtlCol="0" anchor="ctr" wrap="square" lIns="50800" rIns="50800"/>
+          <a:bodyPr wrap="square" lIns="50800" rIns="50800" rtlCol="0" anchor="ctr"/>
           <a:lstStyle/>
           <a:p>
             <a:pPr algn="ctr"/>
@@ -5446,6 +4371,11 @@
               </a:rPr>
               <a:t>ONNX Embeddings</a:t>
             </a:r>
+            <a:endParaRPr sz="800" b="0">
+              <a:solidFill>
+                <a:srgbClr val="333333"/>
+              </a:solidFill>
+            </a:endParaRPr>
           </a:p>
           <a:p>
             <a:pPr algn="ctr"/>
@@ -5457,6 +4387,11 @@
               </a:rPr>
               <a:t>all-MiniLM-L6-v2</a:t>
             </a:r>
+            <a:endParaRPr sz="700">
+              <a:solidFill>
+                <a:srgbClr val="333333"/>
+              </a:solidFill>
+            </a:endParaRPr>
           </a:p>
         </p:txBody>
       </p:sp>
@@ -5468,7 +4403,7 @@
         </p:nvSpPr>
         <p:spPr>
           <a:xfrm>
-            <a:off x="8595360" y="2971800"/>
+            <a:off x="9326880" y="2707005"/>
             <a:ext cx="2011680" cy="347472"/>
           </a:xfrm>
           <a:prstGeom prst="roundRect">
@@ -5498,7 +4433,7 @@
           </a:fontRef>
         </p:style>
         <p:txBody>
-          <a:bodyPr rtlCol="0" anchor="ctr" wrap="square" lIns="50800" rIns="50800"/>
+          <a:bodyPr wrap="square" lIns="50800" rIns="50800" rtlCol="0" anchor="ctr"/>
           <a:lstStyle/>
           <a:p>
             <a:pPr algn="ctr"/>
@@ -5510,6 +4445,11 @@
               </a:rPr>
               <a:t>FAISS Vector Store</a:t>
             </a:r>
+            <a:endParaRPr sz="800" b="0">
+              <a:solidFill>
+                <a:srgbClr val="333333"/>
+              </a:solidFill>
+            </a:endParaRPr>
           </a:p>
           <a:p>
             <a:pPr algn="ctr"/>
@@ -5521,6 +4461,11 @@
               </a:rPr>
               <a:t>28 Standards</a:t>
             </a:r>
+            <a:endParaRPr sz="700">
+              <a:solidFill>
+                <a:srgbClr val="333333"/>
+              </a:solidFill>
+            </a:endParaRPr>
           </a:p>
         </p:txBody>
       </p:sp>
@@ -5532,7 +4477,7 @@
         </p:nvSpPr>
         <p:spPr>
           <a:xfrm>
-            <a:off x="7315200" y="3474720"/>
+            <a:off x="8046720" y="3209925"/>
             <a:ext cx="2743200" cy="365760"/>
           </a:xfrm>
           <a:prstGeom prst="roundRect">
@@ -5562,7 +4507,7 @@
           </a:fontRef>
         </p:style>
         <p:txBody>
-          <a:bodyPr rtlCol="0" anchor="ctr" wrap="square" lIns="50800" rIns="50800"/>
+          <a:bodyPr wrap="square" lIns="50800" rIns="50800" rtlCol="0" anchor="ctr"/>
           <a:lstStyle/>
           <a:p>
             <a:pPr algn="ctr"/>
@@ -5574,6 +4519,11 @@
               </a:rPr>
               <a:t>Gemini 3.6 Flash (LLM)</a:t>
             </a:r>
+            <a:endParaRPr sz="900" b="0">
+              <a:solidFill>
+                <a:srgbClr val="333333"/>
+              </a:solidFill>
+            </a:endParaRPr>
           </a:p>
         </p:txBody>
       </p:sp>
@@ -5585,7 +4535,7 @@
         </p:nvSpPr>
         <p:spPr>
           <a:xfrm>
-            <a:off x="6217920" y="3977639"/>
+            <a:off x="6949440" y="3712844"/>
             <a:ext cx="1645920" cy="320040"/>
           </a:xfrm>
           <a:prstGeom prst="roundRect">
@@ -5615,7 +4565,7 @@
           </a:fontRef>
         </p:style>
         <p:txBody>
-          <a:bodyPr rtlCol="0" anchor="ctr" wrap="square" lIns="50800" rIns="50800"/>
+          <a:bodyPr wrap="square" lIns="50800" rIns="50800" rtlCol="0" anchor="ctr"/>
           <a:lstStyle/>
           <a:p>
             <a:pPr algn="ctr"/>
@@ -5627,6 +4577,11 @@
               </a:rPr>
               <a:t>BIS Standards (28)</a:t>
             </a:r>
+            <a:endParaRPr sz="900" b="0">
+              <a:solidFill>
+                <a:srgbClr val="333333"/>
+              </a:solidFill>
+            </a:endParaRPr>
           </a:p>
         </p:txBody>
       </p:sp>
@@ -5638,7 +4593,7 @@
         </p:nvSpPr>
         <p:spPr>
           <a:xfrm>
-            <a:off x="7955279" y="3977639"/>
+            <a:off x="8686799" y="3712844"/>
             <a:ext cx="1645920" cy="320040"/>
           </a:xfrm>
           <a:prstGeom prst="roundRect">
@@ -5668,7 +4623,7 @@
           </a:fontRef>
         </p:style>
         <p:txBody>
-          <a:bodyPr rtlCol="0" anchor="ctr" wrap="square" lIns="50800" rIns="50800"/>
+          <a:bodyPr wrap="square" lIns="50800" rIns="50800" rtlCol="0" anchor="ctr"/>
           <a:lstStyle/>
           <a:p>
             <a:pPr algn="ctr"/>
@@ -5680,6 +4635,11 @@
               </a:rPr>
               <a:t>25+ BIS Offices</a:t>
             </a:r>
+            <a:endParaRPr sz="900" b="0">
+              <a:solidFill>
+                <a:srgbClr val="333333"/>
+              </a:solidFill>
+            </a:endParaRPr>
           </a:p>
         </p:txBody>
       </p:sp>
@@ -5691,7 +4651,7 @@
         </p:nvSpPr>
         <p:spPr>
           <a:xfrm>
-            <a:off x="9692640" y="3977639"/>
+            <a:off x="10424160" y="3712844"/>
             <a:ext cx="1645920" cy="320040"/>
           </a:xfrm>
           <a:prstGeom prst="roundRect">
@@ -5721,7 +4681,7 @@
           </a:fontRef>
         </p:style>
         <p:txBody>
-          <a:bodyPr rtlCol="0" anchor="ctr" wrap="square" lIns="50800" rIns="50800"/>
+          <a:bodyPr wrap="square" lIns="50800" rIns="50800" rtlCol="0" anchor="ctr"/>
           <a:lstStyle/>
           <a:p>
             <a:pPr algn="ctr"/>
@@ -5733,6 +4693,11 @@
               </a:rPr>
               <a:t>Certifications</a:t>
             </a:r>
+            <a:endParaRPr sz="900" b="0">
+              <a:solidFill>
+                <a:srgbClr val="333333"/>
+              </a:solidFill>
+            </a:endParaRPr>
           </a:p>
         </p:txBody>
       </p:sp>
@@ -5744,7 +4709,7 @@
         </p:nvSpPr>
         <p:spPr>
           <a:xfrm>
-            <a:off x="6858000" y="4480560"/>
+            <a:off x="7589520" y="4215765"/>
             <a:ext cx="3291840" cy="365760"/>
           </a:xfrm>
           <a:prstGeom prst="roundRect">
@@ -5774,18 +4739,23 @@
           </a:fontRef>
         </p:style>
         <p:txBody>
-          <a:bodyPr rtlCol="0" anchor="ctr" wrap="square" lIns="50800" rIns="50800"/>
+          <a:bodyPr wrap="square" lIns="50800" rIns="50800" rtlCol="0" anchor="ctr"/>
           <a:lstStyle/>
           <a:p>
             <a:pPr algn="ctr"/>
             <a:r>
               <a:rPr sz="900" b="1">
                 <a:solidFill>
-                  <a:srgbClr val="FFFFFF"/>
+                  <a:schemeClr val="tx1"/>
                 </a:solidFill>
               </a:rPr>
               <a:t>6-Section Structured Response</a:t>
             </a:r>
+            <a:endParaRPr sz="900" b="1">
+              <a:solidFill>
+                <a:schemeClr val="tx1"/>
+              </a:solidFill>
+            </a:endParaRPr>
           </a:p>
         </p:txBody>
       </p:sp>
@@ -5797,7 +4767,7 @@
         </p:nvSpPr>
         <p:spPr>
           <a:xfrm>
-            <a:off x="6400800" y="4983480"/>
+            <a:off x="7132320" y="4718685"/>
             <a:ext cx="4389120" cy="320040"/>
           </a:xfrm>
           <a:prstGeom prst="roundRect">
@@ -5827,7 +4797,7 @@
           </a:fontRef>
         </p:style>
         <p:txBody>
-          <a:bodyPr rtlCol="0" anchor="ctr" wrap="square" lIns="50800" rIns="50800"/>
+          <a:bodyPr wrap="square" lIns="50800" rIns="50800" rtlCol="0" anchor="ctr"/>
           <a:lstStyle/>
           <a:p>
             <a:pPr algn="ctr"/>
@@ -5839,6 +4809,11 @@
               </a:rPr>
               <a:t>Chat | Standards | Offices | Certs</a:t>
             </a:r>
+            <a:endParaRPr sz="900" b="0">
+              <a:solidFill>
+                <a:srgbClr val="333333"/>
+              </a:solidFill>
+            </a:endParaRPr>
           </a:p>
         </p:txBody>
       </p:sp>
@@ -5850,7 +4825,7 @@
         </p:nvSpPr>
         <p:spPr>
           <a:xfrm>
-            <a:off x="8549640" y="1828800"/>
+            <a:off x="9281160" y="1564005"/>
             <a:ext cx="137160" cy="109728"/>
           </a:xfrm>
           <a:prstGeom prst="downArrow">
@@ -5893,7 +4868,7 @@
         </p:nvSpPr>
         <p:spPr>
           <a:xfrm>
-            <a:off x="8549640" y="2331720"/>
+            <a:off x="9281160" y="2066925"/>
             <a:ext cx="137160" cy="109728"/>
           </a:xfrm>
           <a:prstGeom prst="downArrow">
@@ -6108,7 +5083,7 @@
         </p:nvSpPr>
         <p:spPr>
           <a:xfrm>
-            <a:off x="365760" y="5486400"/>
+            <a:off x="1005840" y="4892040"/>
             <a:ext cx="3657600" cy="320040"/>
           </a:xfrm>
           <a:prstGeom prst="rect">
@@ -6130,6 +5105,11 @@
               </a:rPr>
               <a:t>How it addresses the problem:</a:t>
             </a:r>
+            <a:endParaRPr sz="1300" b="1">
+              <a:solidFill>
+                <a:srgbClr val="1A3A6E"/>
+              </a:solidFill>
+            </a:endParaRPr>
           </a:p>
         </p:txBody>
       </p:sp>
@@ -6141,7 +5121,7 @@
         </p:nvSpPr>
         <p:spPr>
           <a:xfrm>
-            <a:off x="914400" y="5760720"/>
+            <a:off x="1554480" y="5166360"/>
             <a:ext cx="1188720" cy="1188720"/>
           </a:xfrm>
           <a:prstGeom prst="ellipse">
@@ -6171,7 +5151,7 @@
           </a:fontRef>
         </p:style>
         <p:txBody>
-          <a:bodyPr rtlCol="0" anchor="ctr" wrap="square"/>
+          <a:bodyPr wrap="square" rtlCol="0" anchor="ctr"/>
           <a:lstStyle/>
           <a:p>
             <a:pPr algn="ctr"/>
@@ -6185,6 +5165,11 @@
 COMPLEX
 STANDARDS</a:t>
             </a:r>
+            <a:endParaRPr sz="700" b="1">
+              <a:solidFill>
+                <a:srgbClr val="333333"/>
+              </a:solidFill>
+            </a:endParaRPr>
           </a:p>
         </p:txBody>
       </p:sp>
@@ -6196,7 +5181,7 @@
         </p:nvSpPr>
         <p:spPr>
           <a:xfrm>
-            <a:off x="457200" y="5989320"/>
+            <a:off x="1097280" y="5394960"/>
             <a:ext cx="1188720" cy="1188720"/>
           </a:xfrm>
           <a:prstGeom prst="ellipse">
@@ -6226,7 +5211,7 @@
           </a:fontRef>
         </p:style>
         <p:txBody>
-          <a:bodyPr rtlCol="0" anchor="ctr" wrap="square"/>
+          <a:bodyPr wrap="square" rtlCol="0" anchor="ctr"/>
           <a:lstStyle/>
           <a:p>
             <a:pPr algn="ctr"/>
@@ -6240,6 +5225,11 @@
 COMPLIANCE
 PLATFORM</a:t>
             </a:r>
+            <a:endParaRPr sz="700" b="1">
+              <a:solidFill>
+                <a:srgbClr val="333333"/>
+              </a:solidFill>
+            </a:endParaRPr>
           </a:p>
         </p:txBody>
       </p:sp>
@@ -6251,7 +5241,7 @@
         </p:nvSpPr>
         <p:spPr>
           <a:xfrm>
-            <a:off x="1371600" y="5989320"/>
+            <a:off x="2011680" y="5394960"/>
             <a:ext cx="1188720" cy="1188720"/>
           </a:xfrm>
           <a:prstGeom prst="ellipse">
@@ -6281,7 +5271,7 @@
           </a:fontRef>
         </p:style>
         <p:txBody>
-          <a:bodyPr rtlCol="0" anchor="ctr" wrap="square"/>
+          <a:bodyPr wrap="square" rtlCol="0" anchor="ctr"/>
           <a:lstStyle/>
           <a:p>
             <a:pPr algn="ctr"/>
@@ -6294,6 +5284,11 @@
               <a:t>MULTILINGUAL
 AI (22 Lang)</a:t>
             </a:r>
+            <a:endParaRPr sz="700" b="1">
+              <a:solidFill>
+                <a:srgbClr val="333333"/>
+              </a:solidFill>
+            </a:endParaRPr>
           </a:p>
         </p:txBody>
       </p:sp>
@@ -6305,7 +5300,7 @@
         </p:nvSpPr>
         <p:spPr>
           <a:xfrm>
-            <a:off x="1143000" y="6126480"/>
+            <a:off x="1783080" y="5532120"/>
             <a:ext cx="777240" cy="777240"/>
           </a:xfrm>
           <a:prstGeom prst="ellipse">
@@ -6335,7 +5330,7 @@
           </a:fontRef>
         </p:style>
         <p:txBody>
-          <a:bodyPr rtlCol="0" anchor="ctr" wrap="square"/>
+          <a:bodyPr wrap="square" rtlCol="0" anchor="ctr"/>
           <a:lstStyle/>
           <a:p>
             <a:pPr algn="ctr"/>
@@ -6348,239 +5343,38 @@
               <a:t>MANAK
 MITRA</a:t>
             </a:r>
-          </a:p>
-        </p:txBody>
-      </p:sp>
-      <p:sp>
-        <p:nvSpPr>
-          <p:cNvPr id="61" name="TextBox 60"/>
-          <p:cNvSpPr txBox="1"/>
-          <p:nvPr/>
-        </p:nvSpPr>
-        <p:spPr>
-          <a:xfrm>
-            <a:off x="3200400" y="5486400"/>
-            <a:ext cx="5486400" cy="320040"/>
+            <a:endParaRPr sz="800" b="1">
+              <a:solidFill>
+                <a:srgbClr val="FFFFFF"/>
+              </a:solidFill>
+            </a:endParaRPr>
+          </a:p>
+        </p:txBody>
+      </p:sp>
+      <p:pic>
+        <p:nvPicPr>
+          <p:cNvPr id="65" name="Picture 64"/>
+          <p:cNvPicPr>
+            <a:picLocks noChangeAspect="1"/>
+          </p:cNvPicPr>
+          <p:nvPr/>
+        </p:nvPicPr>
+        <p:blipFill>
+          <a:blip r:embed="rId2"/>
+          <a:stretch>
+            <a:fillRect/>
+          </a:stretch>
+        </p:blipFill>
+        <p:spPr>
+          <a:xfrm>
+            <a:off x="4663440" y="5111750"/>
+            <a:ext cx="7118985" cy="1628140"/>
           </a:xfrm>
           <a:prstGeom prst="rect">
             <a:avLst/>
           </a:prstGeom>
-          <a:noFill/>
-        </p:spPr>
-        <p:txBody>
-          <a:bodyPr wrap="none">
-            <a:spAutoFit/>
-          </a:bodyPr>
-          <a:lstStyle/>
-          <a:p>
-            <a:r>
-              <a:rPr sz="1300" b="1">
-                <a:solidFill>
-                  <a:srgbClr val="1A3A6E"/>
-                </a:solidFill>
-              </a:rPr>
-              <a:t>Innovation and Uniqueness:</a:t>
-            </a:r>
-          </a:p>
-        </p:txBody>
-      </p:sp>
-      <p:sp>
-        <p:nvSpPr>
-          <p:cNvPr id="62" name="Rounded Rectangle 61"/>
-          <p:cNvSpPr/>
-          <p:nvPr/>
-        </p:nvSpPr>
-        <p:spPr>
-          <a:xfrm>
-            <a:off x="3200400" y="5806440"/>
-            <a:ext cx="8503920" cy="777240"/>
-          </a:xfrm>
-          <a:prstGeom prst="roundRect">
-            <a:avLst/>
-          </a:prstGeom>
-          <a:solidFill>
-            <a:srgbClr val="F5F5F5"/>
-          </a:solidFill>
-          <a:ln w="12700">
-            <a:solidFill>
-              <a:srgbClr val="1A3A6E"/>
-            </a:solidFill>
-          </a:ln>
-        </p:spPr>
-        <p:style>
-          <a:lnRef idx="1">
-            <a:schemeClr val="accent1"/>
-          </a:lnRef>
-          <a:fillRef idx="3">
-            <a:schemeClr val="accent1"/>
-          </a:fillRef>
-          <a:effectRef idx="2">
-            <a:schemeClr val="accent1"/>
-          </a:effectRef>
-          <a:fontRef idx="minor">
-            <a:schemeClr val="lt1"/>
-          </a:fontRef>
-        </p:style>
-        <p:txBody>
-          <a:bodyPr rtlCol="0" anchor="ctr" wrap="square" lIns="101600" tIns="50800"/>
-          <a:lstStyle/>
-          <a:p>
-            <a:pPr algn="ctr">
-              <a:spcAft>
-                <a:spcPts val="100"/>
-              </a:spcAft>
-            </a:pPr>
-            <a:r>
-              <a:rPr sz="900">
-                <a:solidFill>
-                  <a:srgbClr val="FF6B35"/>
-                </a:solidFill>
-              </a:rPr>
-              <a:t>&gt; </a:t>
-            </a:r>
-            <a:r>
-              <a:rPr sz="900" b="1">
-                <a:solidFill>
-                  <a:srgbClr val="1A3A6E"/>
-                </a:solidFill>
-              </a:rPr>
-              <a:t>Source-Grounded RAG</a:t>
-            </a:r>
-            <a:r>
-              <a:rPr sz="900">
-                <a:solidFill>
-                  <a:srgbClr val="333333"/>
-                </a:solidFill>
-              </a:rPr>
-              <a:t> - ONNX + FAISS, hallucination-free, cited responses</a:t>
-            </a:r>
-          </a:p>
-          <a:p>
-            <a:pPr>
-              <a:spcAft>
-                <a:spcPts val="100"/>
-              </a:spcAft>
-            </a:pPr>
-            <a:r>
-              <a:rPr sz="900">
-                <a:solidFill>
-                  <a:srgbClr val="FF6B35"/>
-                </a:solidFill>
-              </a:rPr>
-              <a:t>&gt; </a:t>
-            </a:r>
-            <a:r>
-              <a:rPr sz="900" b="1">
-                <a:solidFill>
-                  <a:srgbClr val="1A3A6E"/>
-                </a:solidFill>
-              </a:rPr>
-              <a:t>Live BIS Pipeline</a:t>
-            </a:r>
-            <a:r>
-              <a:rPr sz="900">
-                <a:solidFill>
-                  <a:srgbClr val="333333"/>
-                </a:solidFill>
-              </a:rPr>
-              <a:t> - Auto-fetches new standards, always current</a:t>
-            </a:r>
-          </a:p>
-          <a:p>
-            <a:pPr>
-              <a:spcAft>
-                <a:spcPts val="100"/>
-              </a:spcAft>
-            </a:pPr>
-            <a:r>
-              <a:rPr sz="900">
-                <a:solidFill>
-                  <a:srgbClr val="FF6B35"/>
-                </a:solidFill>
-              </a:rPr>
-              <a:t>&gt; </a:t>
-            </a:r>
-            <a:r>
-              <a:rPr sz="900" b="1">
-                <a:solidFill>
-                  <a:srgbClr val="1A3A6E"/>
-                </a:solidFill>
-              </a:rPr>
-              <a:t>22 Indian Languages</a:t>
-            </a:r>
-            <a:r>
-              <a:rPr sz="900">
-                <a:solidFill>
-                  <a:srgbClr val="333333"/>
-                </a:solidFill>
-              </a:rPr>
-              <a:t> - Auto-detect, translate, RAG, translate-back</a:t>
-            </a:r>
-          </a:p>
-          <a:p>
-            <a:pPr>
-              <a:spcAft>
-                <a:spcPts val="100"/>
-              </a:spcAft>
-            </a:pPr>
-            <a:r>
-              <a:rPr sz="900">
-                <a:solidFill>
-                  <a:srgbClr val="FF6B35"/>
-                </a:solidFill>
-              </a:rPr>
-              <a:t>&gt; </a:t>
-            </a:r>
-            <a:r>
-              <a:rPr sz="900" b="1">
-                <a:solidFill>
-                  <a:srgbClr val="1A3A6E"/>
-                </a:solidFill>
-              </a:rPr>
-              <a:t>6-Section Responses</a:t>
-            </a:r>
-            <a:r>
-              <a:rPr sz="900">
-                <a:solidFill>
-                  <a:srgbClr val="333333"/>
-                </a:solidFill>
-              </a:rPr>
-              <a:t> - Standards, testing, offices, legal, QC, documents</a:t>
-            </a:r>
-          </a:p>
-          <a:p>
-            <a:pPr>
-              <a:spcAft>
-                <a:spcPts val="100"/>
-              </a:spcAft>
-            </a:pPr>
-            <a:r>
-              <a:rPr sz="900">
-                <a:solidFill>
-                  <a:srgbClr val="FF6B35"/>
-                </a:solidFill>
-              </a:rPr>
-              <a:t>&gt; </a:t>
-            </a:r>
-            <a:r>
-              <a:rPr sz="900" b="1">
-                <a:solidFill>
-                  <a:srgbClr val="1A3A6E"/>
-                </a:solidFill>
-              </a:rPr>
-              <a:t>Unified Ecosystem</a:t>
-            </a:r>
-            <a:r>
-              <a:rPr sz="900">
-                <a:solidFill>
-                  <a:srgbClr val="333333"/>
-                </a:solidFill>
-              </a:rPr>
-              <a:t> - Standards + certs + labs + AI in one platform</a:t>
-            </a:r>
-          </a:p>
-        </p:txBody>
-      </p:sp>
+        </p:spPr>
+      </p:pic>
     </p:spTree>
   </p:cSld>
   <p:clrMapOvr>
@@ -6590,7 +5384,7 @@
 </file>
 
 <file path=ppt/slides/slide3.xml><?xml version="1.0" encoding="utf-8"?>
-<p:sld xmlns:a="http://schemas.openxmlformats.org/drawingml/2006/main" xmlns:p="http://schemas.openxmlformats.org/presentationml/2006/main" xmlns:r="http://schemas.openxmlformats.org/officeDocument/2006/relationships">
+<p:sld xmlns:a="http://schemas.openxmlformats.org/drawingml/2006/main" xmlns:r="http://schemas.openxmlformats.org/officeDocument/2006/relationships" xmlns:p="http://schemas.openxmlformats.org/presentationml/2006/main">
   <p:cSld>
     <p:spTree>
       <p:nvGrpSpPr>
@@ -6694,6 +5488,11 @@
               </a:rPr>
               <a:t>Resonant</a:t>
             </a:r>
+            <a:endParaRPr sz="1800" b="1">
+              <a:solidFill>
+                <a:srgbClr val="1A3A6E"/>
+              </a:solidFill>
+            </a:endParaRPr>
           </a:p>
         </p:txBody>
       </p:sp>
@@ -6728,6 +5527,11 @@
               </a:rPr>
               <a:t>MANAKMITRA</a:t>
             </a:r>
+            <a:endParaRPr sz="2800" b="1">
+              <a:solidFill>
+                <a:srgbClr val="1A3A6E"/>
+              </a:solidFill>
+            </a:endParaRPr>
           </a:p>
         </p:txBody>
       </p:sp>
@@ -6779,6 +5583,11 @@
               </a:rPr>
               <a:t>SIH</a:t>
             </a:r>
+            <a:endParaRPr sz="1000" b="1">
+              <a:solidFill>
+                <a:srgbClr val="FFFFFF"/>
+              </a:solidFill>
+            </a:endParaRPr>
           </a:p>
         </p:txBody>
       </p:sp>
@@ -6814,6 +5623,11 @@
               <a:t>SMART INDIA
 HACKATHON 2026</a:t>
             </a:r>
+            <a:endParaRPr sz="1000" b="1">
+              <a:solidFill>
+                <a:srgbClr val="1A3A6E"/>
+              </a:solidFill>
+            </a:endParaRPr>
           </a:p>
         </p:txBody>
       </p:sp>
@@ -6890,6 +5704,11 @@
               </a:rPr>
               <a:t>@SIH Idea submission</a:t>
             </a:r>
+            <a:endParaRPr sz="900">
+              <a:solidFill>
+                <a:srgbClr val="999999"/>
+              </a:solidFill>
+            </a:endParaRPr>
           </a:p>
         </p:txBody>
       </p:sp>
@@ -6924,6 +5743,11 @@
               </a:rPr>
               <a:t>3</a:t>
             </a:r>
+            <a:endParaRPr sz="900">
+              <a:solidFill>
+                <a:srgbClr val="999999"/>
+              </a:solidFill>
+            </a:endParaRPr>
           </a:p>
         </p:txBody>
       </p:sp>
@@ -6957,6 +5781,11 @@
               </a:rPr>
               <a:t>TECHNICAL APPROACH</a:t>
             </a:r>
+            <a:endParaRPr sz="2200" b="1">
+              <a:solidFill>
+                <a:srgbClr val="1A3A6E"/>
+              </a:solidFill>
+            </a:endParaRPr>
           </a:p>
         </p:txBody>
       </p:sp>
@@ -6990,6 +5819,11 @@
               </a:rPr>
               <a:t>Tech Stack:</a:t>
             </a:r>
+            <a:endParaRPr sz="1800" b="1">
+              <a:solidFill>
+                <a:srgbClr val="1A3A6E"/>
+              </a:solidFill>
+            </a:endParaRPr>
           </a:p>
         </p:txBody>
       </p:sp>
@@ -7044,6 +5878,11 @@
               </a:rPr>
               <a:t> React.js, Vite, Tailwind CSS</a:t>
             </a:r>
+            <a:endParaRPr sz="1300">
+              <a:solidFill>
+                <a:srgbClr val="333333"/>
+              </a:solidFill>
+            </a:endParaRPr>
           </a:p>
           <a:p>
             <a:pPr>
@@ -7075,6 +5914,11 @@
               </a:rPr>
               <a:t> Python, FastAPI, Uvicorn</a:t>
             </a:r>
+            <a:endParaRPr sz="1300">
+              <a:solidFill>
+                <a:srgbClr val="333333"/>
+              </a:solidFill>
+            </a:endParaRPr>
           </a:p>
           <a:p>
             <a:pPr>
@@ -7106,6 +5950,11 @@
               </a:rPr>
               <a:t> FAISS Vector Store, JSON user store</a:t>
             </a:r>
+            <a:endParaRPr sz="1300">
+              <a:solidFill>
+                <a:srgbClr val="333333"/>
+              </a:solidFill>
+            </a:endParaRPr>
           </a:p>
           <a:p>
             <a:pPr>
@@ -7137,6 +5986,11 @@
               </a:rPr>
               <a:t> Google Gemini API, ONNX Runtime, Sentence Transformers</a:t>
             </a:r>
+            <a:endParaRPr sz="1300">
+              <a:solidFill>
+                <a:srgbClr val="333333"/>
+              </a:solidFill>
+            </a:endParaRPr>
           </a:p>
           <a:p>
             <a:pPr>
@@ -7168,6 +6022,11 @@
               </a:rPr>
               <a:t> all-MiniLM-L6-v2 (384-dim), FAISS indexing</a:t>
             </a:r>
+            <a:endParaRPr sz="1300">
+              <a:solidFill>
+                <a:srgbClr val="333333"/>
+              </a:solidFill>
+            </a:endParaRPr>
           </a:p>
           <a:p>
             <a:pPr>
@@ -7199,6 +6058,11 @@
               </a:rPr>
               <a:t> PDFPlumber, Text chunking, Vector indexing</a:t>
             </a:r>
+            <a:endParaRPr sz="1300">
+              <a:solidFill>
+                <a:srgbClr val="333333"/>
+              </a:solidFill>
+            </a:endParaRPr>
           </a:p>
           <a:p>
             <a:pPr>
@@ -7230,6 +6094,11 @@
               </a:rPr>
               <a:t> JWT tokens, bcrypt password hashing</a:t>
             </a:r>
+            <a:endParaRPr sz="1300">
+              <a:solidFill>
+                <a:srgbClr val="333333"/>
+              </a:solidFill>
+            </a:endParaRPr>
           </a:p>
           <a:p>
             <a:pPr>
@@ -7261,6 +6130,11 @@
               </a:rPr>
               <a:t> deep-translator, langdetect (22 Indian languages)</a:t>
             </a:r>
+            <a:endParaRPr sz="1300">
+              <a:solidFill>
+                <a:srgbClr val="333333"/>
+              </a:solidFill>
+            </a:endParaRPr>
           </a:p>
           <a:p>
             <a:pPr>
@@ -7292,6 +6166,11 @@
               </a:rPr>
               <a:t> Git/GitHub, Vercel (Frontend), Render (Backend)</a:t>
             </a:r>
+            <a:endParaRPr sz="1300">
+              <a:solidFill>
+                <a:srgbClr val="333333"/>
+              </a:solidFill>
+            </a:endParaRPr>
           </a:p>
         </p:txBody>
       </p:sp>
@@ -7333,6 +6212,11 @@
               </a:rPr>
               <a:t>manakmitra-frontend.vercel.app</a:t>
             </a:r>
+            <a:endParaRPr sz="1400" b="1">
+              <a:solidFill>
+                <a:srgbClr val="2196F3"/>
+              </a:solidFill>
+            </a:endParaRPr>
           </a:p>
         </p:txBody>
       </p:sp>
@@ -7409,6 +6293,11 @@
               </a:rPr>
               <a:t>Architecture Flow:</a:t>
             </a:r>
+            <a:endParaRPr sz="1600" b="1">
+              <a:solidFill>
+                <a:srgbClr val="1A3A6E"/>
+              </a:solidFill>
+            </a:endParaRPr>
           </a:p>
         </p:txBody>
       </p:sp>
@@ -7450,14 +6339,10 @@
           </a:fontRef>
         </p:style>
         <p:txBody>
-          <a:bodyPr rtlCol="0" anchor="ctr" wrap="square" lIns="63500" rIns="63500" tIns="38100"/>
-          <a:lstStyle/>
-          <a:p>
-            <a:pPr algn="ctr"/>
-            <a:r>
-              <a:rPr sz="1800"/>
-              <a:t/>
-            </a:r>
+          <a:bodyPr wrap="square" lIns="63500" tIns="38100" rIns="63500" rtlCol="0" anchor="ctr"/>
+          <a:lstStyle/>
+          <a:p>
+            <a:pPr algn="ctr"/>
           </a:p>
           <a:p>
             <a:pPr algn="ctr"/>
@@ -7469,6 +6354,11 @@
               </a:rPr>
               <a:t>User</a:t>
             </a:r>
+            <a:endParaRPr sz="1000" b="1">
+              <a:solidFill>
+                <a:srgbClr val="4CAF50"/>
+              </a:solidFill>
+            </a:endParaRPr>
           </a:p>
           <a:p>
             <a:pPr algn="ctr">
@@ -7484,6 +6374,11 @@
               </a:rPr>
               <a:t>Enters product query</a:t>
             </a:r>
+            <a:endParaRPr sz="800">
+              <a:solidFill>
+                <a:srgbClr val="333333"/>
+              </a:solidFill>
+            </a:endParaRPr>
           </a:p>
           <a:p>
             <a:pPr algn="ctr">
@@ -7499,6 +6394,11 @@
               </a:rPr>
               <a:t>Selects language</a:t>
             </a:r>
+            <a:endParaRPr sz="800">
+              <a:solidFill>
+                <a:srgbClr val="333333"/>
+              </a:solidFill>
+            </a:endParaRPr>
           </a:p>
           <a:p>
             <a:pPr algn="ctr">
@@ -7514,6 +6414,11 @@
               </a:rPr>
               <a:t>Voice input (opt)</a:t>
             </a:r>
+            <a:endParaRPr sz="800">
+              <a:solidFill>
+                <a:srgbClr val="333333"/>
+              </a:solidFill>
+            </a:endParaRPr>
           </a:p>
         </p:txBody>
       </p:sp>
@@ -7555,14 +6460,10 @@
           </a:fontRef>
         </p:style>
         <p:txBody>
-          <a:bodyPr rtlCol="0" anchor="ctr" wrap="square" lIns="63500" rIns="63500" tIns="38100"/>
-          <a:lstStyle/>
-          <a:p>
-            <a:pPr algn="ctr"/>
-            <a:r>
-              <a:rPr sz="1800"/>
-              <a:t/>
-            </a:r>
+          <a:bodyPr wrap="square" lIns="63500" tIns="38100" rIns="63500" rtlCol="0" anchor="ctr"/>
+          <a:lstStyle/>
+          <a:p>
+            <a:pPr algn="ctr"/>
           </a:p>
           <a:p>
             <a:pPr algn="ctr"/>
@@ -7574,6 +6475,11 @@
               </a:rPr>
               <a:t>ManakMitra App</a:t>
             </a:r>
+            <a:endParaRPr sz="1000" b="1">
+              <a:solidFill>
+                <a:srgbClr val="2196F3"/>
+              </a:solidFill>
+            </a:endParaRPr>
           </a:p>
           <a:p>
             <a:pPr algn="ctr">
@@ -7589,6 +6495,11 @@
               </a:rPr>
               <a:t>React + Vite</a:t>
             </a:r>
+            <a:endParaRPr sz="800">
+              <a:solidFill>
+                <a:srgbClr val="333333"/>
+              </a:solidFill>
+            </a:endParaRPr>
           </a:p>
           <a:p>
             <a:pPr algn="ctr">
@@ -7604,6 +6515,11 @@
               </a:rPr>
               <a:t>Multilingual UI</a:t>
             </a:r>
+            <a:endParaRPr sz="800">
+              <a:solidFill>
+                <a:srgbClr val="333333"/>
+              </a:solidFill>
+            </a:endParaRPr>
           </a:p>
           <a:p>
             <a:pPr algn="ctr">
@@ -7619,6 +6535,11 @@
               </a:rPr>
               <a:t>Chat + Dashboard</a:t>
             </a:r>
+            <a:endParaRPr sz="800">
+              <a:solidFill>
+                <a:srgbClr val="333333"/>
+              </a:solidFill>
+            </a:endParaRPr>
           </a:p>
         </p:txBody>
       </p:sp>
@@ -7660,14 +6581,10 @@
           </a:fontRef>
         </p:style>
         <p:txBody>
-          <a:bodyPr rtlCol="0" anchor="ctr" wrap="square" lIns="63500" rIns="63500" tIns="38100"/>
-          <a:lstStyle/>
-          <a:p>
-            <a:pPr algn="ctr"/>
-            <a:r>
-              <a:rPr sz="1800"/>
-              <a:t/>
-            </a:r>
+          <a:bodyPr wrap="square" lIns="63500" tIns="38100" rIns="63500" rtlCol="0" anchor="ctr"/>
+          <a:lstStyle/>
+          <a:p>
+            <a:pPr algn="ctr"/>
           </a:p>
           <a:p>
             <a:pPr algn="ctr"/>
@@ -7679,6 +6596,11 @@
               </a:rPr>
               <a:t>RAG Engine</a:t>
             </a:r>
+            <a:endParaRPr sz="1000" b="1">
+              <a:solidFill>
+                <a:srgbClr val="1A3A6E"/>
+              </a:solidFill>
+            </a:endParaRPr>
           </a:p>
           <a:p>
             <a:pPr algn="ctr">
@@ -7694,6 +6616,11 @@
               </a:rPr>
               <a:t>ONNX + FAISS</a:t>
             </a:r>
+            <a:endParaRPr sz="800">
+              <a:solidFill>
+                <a:srgbClr val="333333"/>
+              </a:solidFill>
+            </a:endParaRPr>
           </a:p>
           <a:p>
             <a:pPr algn="ctr">
@@ -7709,6 +6636,11 @@
               </a:rPr>
               <a:t>Vector search</a:t>
             </a:r>
+            <a:endParaRPr sz="800">
+              <a:solidFill>
+                <a:srgbClr val="333333"/>
+              </a:solidFill>
+            </a:endParaRPr>
           </a:p>
           <a:p>
             <a:pPr algn="ctr">
@@ -7724,6 +6656,11 @@
               </a:rPr>
               <a:t>Context retrieval</a:t>
             </a:r>
+            <a:endParaRPr sz="800">
+              <a:solidFill>
+                <a:srgbClr val="333333"/>
+              </a:solidFill>
+            </a:endParaRPr>
           </a:p>
         </p:txBody>
       </p:sp>
@@ -7851,14 +6788,10 @@
           </a:fontRef>
         </p:style>
         <p:txBody>
-          <a:bodyPr rtlCol="0" anchor="ctr" wrap="square" lIns="63500" rIns="63500" tIns="38100"/>
-          <a:lstStyle/>
-          <a:p>
-            <a:pPr algn="ctr"/>
-            <a:r>
-              <a:rPr sz="1800"/>
-              <a:t/>
-            </a:r>
+          <a:bodyPr wrap="square" lIns="63500" tIns="38100" rIns="63500" rtlCol="0" anchor="ctr"/>
+          <a:lstStyle/>
+          <a:p>
+            <a:pPr algn="ctr"/>
           </a:p>
           <a:p>
             <a:pPr algn="ctr"/>
@@ -7870,6 +6803,11 @@
               </a:rPr>
               <a:t>BIS Retrieval</a:t>
             </a:r>
+            <a:endParaRPr sz="1000" b="1">
+              <a:solidFill>
+                <a:srgbClr val="FF9800"/>
+              </a:solidFill>
+            </a:endParaRPr>
           </a:p>
           <a:p>
             <a:pPr algn="ctr">
@@ -7885,6 +6823,11 @@
               </a:rPr>
               <a:t>Fetch standards from</a:t>
             </a:r>
+            <a:endParaRPr sz="800">
+              <a:solidFill>
+                <a:srgbClr val="333333"/>
+              </a:solidFill>
+            </a:endParaRPr>
           </a:p>
           <a:p>
             <a:pPr algn="ctr">
@@ -7900,6 +6843,11 @@
               </a:rPr>
               <a:t>bis.gov.in</a:t>
             </a:r>
+            <a:endParaRPr sz="800">
+              <a:solidFill>
+                <a:srgbClr val="333333"/>
+              </a:solidFill>
+            </a:endParaRPr>
           </a:p>
           <a:p>
             <a:pPr algn="ctr">
@@ -7915,6 +6863,11 @@
               </a:rPr>
               <a:t>Auto-fetch pipeline</a:t>
             </a:r>
+            <a:endParaRPr sz="800">
+              <a:solidFill>
+                <a:srgbClr val="333333"/>
+              </a:solidFill>
+            </a:endParaRPr>
           </a:p>
         </p:txBody>
       </p:sp>
@@ -7999,14 +6952,10 @@
           </a:fontRef>
         </p:style>
         <p:txBody>
-          <a:bodyPr rtlCol="0" anchor="ctr" wrap="square" lIns="63500" rIns="63500" tIns="38100"/>
-          <a:lstStyle/>
-          <a:p>
-            <a:pPr algn="ctr"/>
-            <a:r>
-              <a:rPr sz="1800"/>
-              <a:t/>
-            </a:r>
+          <a:bodyPr wrap="square" lIns="63500" tIns="38100" rIns="63500" rtlCol="0" anchor="ctr"/>
+          <a:lstStyle/>
+          <a:p>
+            <a:pPr algn="ctr"/>
           </a:p>
           <a:p>
             <a:pPr algn="ctr"/>
@@ -8018,6 +6967,11 @@
               </a:rPr>
               <a:t>Gemini LLM</a:t>
             </a:r>
+            <a:endParaRPr sz="1000" b="1">
+              <a:solidFill>
+                <a:srgbClr val="9C27B0"/>
+              </a:solidFill>
+            </a:endParaRPr>
           </a:p>
           <a:p>
             <a:pPr algn="ctr">
@@ -8033,6 +6987,11 @@
               </a:rPr>
               <a:t>Generate 6-section</a:t>
             </a:r>
+            <a:endParaRPr sz="800">
+              <a:solidFill>
+                <a:srgbClr val="333333"/>
+              </a:solidFill>
+            </a:endParaRPr>
           </a:p>
           <a:p>
             <a:pPr algn="ctr">
@@ -8048,6 +7007,11 @@
               </a:rPr>
               <a:t>structured response</a:t>
             </a:r>
+            <a:endParaRPr sz="800">
+              <a:solidFill>
+                <a:srgbClr val="333333"/>
+              </a:solidFill>
+            </a:endParaRPr>
           </a:p>
           <a:p>
             <a:pPr algn="ctr">
@@ -8063,6 +7027,11 @@
               </a:rPr>
               <a:t>Source-grounded</a:t>
             </a:r>
+            <a:endParaRPr sz="800">
+              <a:solidFill>
+                <a:srgbClr val="333333"/>
+              </a:solidFill>
+            </a:endParaRPr>
           </a:p>
         </p:txBody>
       </p:sp>
@@ -8147,14 +7116,10 @@
           </a:fontRef>
         </p:style>
         <p:txBody>
-          <a:bodyPr rtlCol="0" anchor="ctr" wrap="square" lIns="63500" rIns="63500" tIns="38100"/>
-          <a:lstStyle/>
-          <a:p>
-            <a:pPr algn="ctr"/>
-            <a:r>
-              <a:rPr sz="1800"/>
-              <a:t/>
-            </a:r>
+          <a:bodyPr wrap="square" lIns="63500" tIns="38100" rIns="63500" rtlCol="0" anchor="ctr"/>
+          <a:lstStyle/>
+          <a:p>
+            <a:pPr algn="ctr"/>
           </a:p>
           <a:p>
             <a:pPr algn="ctr"/>
@@ -8166,6 +7131,11 @@
               </a:rPr>
               <a:t>Response</a:t>
             </a:r>
+            <a:endParaRPr sz="1000" b="1">
+              <a:solidFill>
+                <a:srgbClr val="4CAF50"/>
+              </a:solidFill>
+            </a:endParaRPr>
           </a:p>
           <a:p>
             <a:pPr algn="ctr">
@@ -8181,6 +7151,11 @@
               </a:rPr>
               <a:t>Standards + Testing</a:t>
             </a:r>
+            <a:endParaRPr sz="800">
+              <a:solidFill>
+                <a:srgbClr val="333333"/>
+              </a:solidFill>
+            </a:endParaRPr>
           </a:p>
           <a:p>
             <a:pPr algn="ctr">
@@ -8196,6 +7171,11 @@
               </a:rPr>
               <a:t>Offices + Certs</a:t>
             </a:r>
+            <a:endParaRPr sz="800">
+              <a:solidFill>
+                <a:srgbClr val="333333"/>
+              </a:solidFill>
+            </a:endParaRPr>
           </a:p>
           <a:p>
             <a:pPr algn="ctr">
@@ -8211,6 +7191,11 @@
               </a:rPr>
               <a:t>Documents + QC</a:t>
             </a:r>
+            <a:endParaRPr sz="800">
+              <a:solidFill>
+                <a:srgbClr val="333333"/>
+              </a:solidFill>
+            </a:endParaRPr>
           </a:p>
         </p:txBody>
       </p:sp>
@@ -8295,7 +7280,7 @@
           </a:fontRef>
         </p:style>
         <p:txBody>
-          <a:bodyPr rtlCol="0" anchor="ctr" wrap="square"/>
+          <a:bodyPr wrap="square" rtlCol="0" anchor="ctr"/>
           <a:lstStyle/>
           <a:p>
             <a:pPr algn="ctr"/>
@@ -8308,6 +7293,11 @@
               <a:t>Standards
 Library</a:t>
             </a:r>
+            <a:endParaRPr sz="900" b="1">
+              <a:solidFill>
+                <a:srgbClr val="333333"/>
+              </a:solidFill>
+            </a:endParaRPr>
           </a:p>
         </p:txBody>
       </p:sp>
@@ -8349,7 +7339,7 @@
           </a:fontRef>
         </p:style>
         <p:txBody>
-          <a:bodyPr rtlCol="0" anchor="ctr" wrap="square"/>
+          <a:bodyPr wrap="square" rtlCol="0" anchor="ctr"/>
           <a:lstStyle/>
           <a:p>
             <a:pPr algn="ctr"/>
@@ -8362,6 +7352,11 @@
               <a:t>BIS Office
 Finder</a:t>
             </a:r>
+            <a:endParaRPr sz="900" b="1">
+              <a:solidFill>
+                <a:srgbClr val="333333"/>
+              </a:solidFill>
+            </a:endParaRPr>
           </a:p>
         </p:txBody>
       </p:sp>
@@ -8403,7 +7398,7 @@
           </a:fontRef>
         </p:style>
         <p:txBody>
-          <a:bodyPr rtlCol="0" anchor="ctr" wrap="square"/>
+          <a:bodyPr wrap="square" rtlCol="0" anchor="ctr"/>
           <a:lstStyle/>
           <a:p>
             <a:pPr algn="ctr"/>
@@ -8416,6 +7411,11 @@
               <a:t>Certification
 Guide</a:t>
             </a:r>
+            <a:endParaRPr sz="900" b="1">
+              <a:solidFill>
+                <a:srgbClr val="333333"/>
+              </a:solidFill>
+            </a:endParaRPr>
           </a:p>
         </p:txBody>
       </p:sp>
@@ -8457,7 +7457,7 @@
           </a:fontRef>
         </p:style>
         <p:txBody>
-          <a:bodyPr rtlCol="0" anchor="ctr" wrap="square"/>
+          <a:bodyPr wrap="square" rtlCol="0" anchor="ctr"/>
           <a:lstStyle/>
           <a:p>
             <a:pPr algn="ctr"/>
@@ -8470,6 +7470,11 @@
               <a:t>Analytics
 Dashboard</a:t>
             </a:r>
+            <a:endParaRPr sz="900" b="1">
+              <a:solidFill>
+                <a:srgbClr val="333333"/>
+              </a:solidFill>
+            </a:endParaRPr>
           </a:p>
         </p:txBody>
       </p:sp>
@@ -8503,6 +7508,11 @@
               </a:rPr>
               <a:t>Tech Used:</a:t>
             </a:r>
+            <a:endParaRPr sz="1300" b="1">
+              <a:solidFill>
+                <a:srgbClr val="1A3A6E"/>
+              </a:solidFill>
+            </a:endParaRPr>
           </a:p>
         </p:txBody>
       </p:sp>
@@ -8544,7 +7554,7 @@
           </a:fontRef>
         </p:style>
         <p:txBody>
-          <a:bodyPr rtlCol="0" anchor="ctr" wrap="square" lIns="38100" tIns="25400"/>
+          <a:bodyPr wrap="square" lIns="38100" tIns="25400" rtlCol="0" anchor="ctr"/>
           <a:lstStyle/>
           <a:p>
             <a:pPr algn="ctr"/>
@@ -8556,6 +7566,11 @@
               </a:rPr>
               <a:t>Frontend</a:t>
             </a:r>
+            <a:endParaRPr sz="800" b="1">
+              <a:solidFill>
+                <a:srgbClr val="1A3A6E"/>
+              </a:solidFill>
+            </a:endParaRPr>
           </a:p>
           <a:p>
             <a:pPr algn="ctr">
@@ -8571,6 +7586,11 @@
               </a:rPr>
               <a:t>React</a:t>
             </a:r>
+            <a:endParaRPr sz="700">
+              <a:solidFill>
+                <a:srgbClr val="333333"/>
+              </a:solidFill>
+            </a:endParaRPr>
           </a:p>
           <a:p>
             <a:pPr algn="ctr">
@@ -8586,6 +7606,11 @@
               </a:rPr>
               <a:t>Vite</a:t>
             </a:r>
+            <a:endParaRPr sz="700">
+              <a:solidFill>
+                <a:srgbClr val="333333"/>
+              </a:solidFill>
+            </a:endParaRPr>
           </a:p>
           <a:p>
             <a:pPr algn="ctr">
@@ -8601,6 +7626,11 @@
               </a:rPr>
               <a:t>Tailwind</a:t>
             </a:r>
+            <a:endParaRPr sz="700">
+              <a:solidFill>
+                <a:srgbClr val="333333"/>
+              </a:solidFill>
+            </a:endParaRPr>
           </a:p>
         </p:txBody>
       </p:sp>
@@ -8642,7 +7672,7 @@
           </a:fontRef>
         </p:style>
         <p:txBody>
-          <a:bodyPr rtlCol="0" anchor="ctr" wrap="square" lIns="38100" tIns="25400"/>
+          <a:bodyPr wrap="square" lIns="38100" tIns="25400" rtlCol="0" anchor="ctr"/>
           <a:lstStyle/>
           <a:p>
             <a:pPr algn="ctr"/>
@@ -8654,6 +7684,11 @@
               </a:rPr>
               <a:t>Backend</a:t>
             </a:r>
+            <a:endParaRPr sz="800" b="1">
+              <a:solidFill>
+                <a:srgbClr val="1A3A6E"/>
+              </a:solidFill>
+            </a:endParaRPr>
           </a:p>
           <a:p>
             <a:pPr algn="ctr">
@@ -8669,6 +7704,11 @@
               </a:rPr>
               <a:t>Python</a:t>
             </a:r>
+            <a:endParaRPr sz="700">
+              <a:solidFill>
+                <a:srgbClr val="333333"/>
+              </a:solidFill>
+            </a:endParaRPr>
           </a:p>
           <a:p>
             <a:pPr algn="ctr">
@@ -8684,6 +7724,11 @@
               </a:rPr>
               <a:t>FastAPI</a:t>
             </a:r>
+            <a:endParaRPr sz="700">
+              <a:solidFill>
+                <a:srgbClr val="333333"/>
+              </a:solidFill>
+            </a:endParaRPr>
           </a:p>
           <a:p>
             <a:pPr algn="ctr">
@@ -8699,6 +7744,11 @@
               </a:rPr>
               <a:t>Uvicorn</a:t>
             </a:r>
+            <a:endParaRPr sz="700">
+              <a:solidFill>
+                <a:srgbClr val="333333"/>
+              </a:solidFill>
+            </a:endParaRPr>
           </a:p>
         </p:txBody>
       </p:sp>
@@ -8740,7 +7790,7 @@
           </a:fontRef>
         </p:style>
         <p:txBody>
-          <a:bodyPr rtlCol="0" anchor="ctr" wrap="square" lIns="38100" tIns="25400"/>
+          <a:bodyPr wrap="square" lIns="38100" tIns="25400" rtlCol="0" anchor="ctr"/>
           <a:lstStyle/>
           <a:p>
             <a:pPr algn="ctr"/>
@@ -8752,6 +7802,11 @@
               </a:rPr>
               <a:t>AI/ML</a:t>
             </a:r>
+            <a:endParaRPr sz="800" b="1">
+              <a:solidFill>
+                <a:srgbClr val="1A3A6E"/>
+              </a:solidFill>
+            </a:endParaRPr>
           </a:p>
           <a:p>
             <a:pPr algn="ctr">
@@ -8767,6 +7822,11 @@
               </a:rPr>
               <a:t>Gemini</a:t>
             </a:r>
+            <a:endParaRPr sz="700">
+              <a:solidFill>
+                <a:srgbClr val="333333"/>
+              </a:solidFill>
+            </a:endParaRPr>
           </a:p>
           <a:p>
             <a:pPr algn="ctr">
@@ -8782,6 +7842,11 @@
               </a:rPr>
               <a:t>ONNX</a:t>
             </a:r>
+            <a:endParaRPr sz="700">
+              <a:solidFill>
+                <a:srgbClr val="333333"/>
+              </a:solidFill>
+            </a:endParaRPr>
           </a:p>
           <a:p>
             <a:pPr algn="ctr">
@@ -8797,6 +7862,11 @@
               </a:rPr>
               <a:t>FAISS</a:t>
             </a:r>
+            <a:endParaRPr sz="700">
+              <a:solidFill>
+                <a:srgbClr val="333333"/>
+              </a:solidFill>
+            </a:endParaRPr>
           </a:p>
           <a:p>
             <a:pPr algn="ctr">
@@ -8812,6 +7882,11 @@
               </a:rPr>
               <a:t>NumPy</a:t>
             </a:r>
+            <a:endParaRPr sz="700">
+              <a:solidFill>
+                <a:srgbClr val="333333"/>
+              </a:solidFill>
+            </a:endParaRPr>
           </a:p>
         </p:txBody>
       </p:sp>
@@ -8853,7 +7928,7 @@
           </a:fontRef>
         </p:style>
         <p:txBody>
-          <a:bodyPr rtlCol="0" anchor="ctr" wrap="square" lIns="38100" tIns="25400"/>
+          <a:bodyPr wrap="square" lIns="38100" tIns="25400" rtlCol="0" anchor="ctr"/>
           <a:lstStyle/>
           <a:p>
             <a:pPr algn="ctr"/>
@@ -8865,6 +7940,11 @@
               </a:rPr>
               <a:t>Data</a:t>
             </a:r>
+            <a:endParaRPr sz="800" b="1">
+              <a:solidFill>
+                <a:srgbClr val="1A3A6E"/>
+              </a:solidFill>
+            </a:endParaRPr>
           </a:p>
           <a:p>
             <a:pPr algn="ctr">
@@ -8880,6 +7960,11 @@
               </a:rPr>
               <a:t>PDF</a:t>
             </a:r>
+            <a:endParaRPr sz="700">
+              <a:solidFill>
+                <a:srgbClr val="333333"/>
+              </a:solidFill>
+            </a:endParaRPr>
           </a:p>
           <a:p>
             <a:pPr algn="ctr">
@@ -8895,6 +7980,11 @@
               </a:rPr>
               <a:t>Chunk</a:t>
             </a:r>
+            <a:endParaRPr sz="700">
+              <a:solidFill>
+                <a:srgbClr val="333333"/>
+              </a:solidFill>
+            </a:endParaRPr>
           </a:p>
           <a:p>
             <a:pPr algn="ctr">
@@ -8910,6 +8000,11 @@
               </a:rPr>
               <a:t>Embed</a:t>
             </a:r>
+            <a:endParaRPr sz="700">
+              <a:solidFill>
+                <a:srgbClr val="333333"/>
+              </a:solidFill>
+            </a:endParaRPr>
           </a:p>
           <a:p>
             <a:pPr algn="ctr">
@@ -8925,6 +8020,11 @@
               </a:rPr>
               <a:t>Index</a:t>
             </a:r>
+            <a:endParaRPr sz="700">
+              <a:solidFill>
+                <a:srgbClr val="333333"/>
+              </a:solidFill>
+            </a:endParaRPr>
           </a:p>
         </p:txBody>
       </p:sp>
@@ -8966,7 +8066,7 @@
           </a:fontRef>
         </p:style>
         <p:txBody>
-          <a:bodyPr rtlCol="0" anchor="ctr" wrap="square" lIns="38100" tIns="25400"/>
+          <a:bodyPr wrap="square" lIns="38100" tIns="25400" rtlCol="0" anchor="ctr"/>
           <a:lstStyle/>
           <a:p>
             <a:pPr algn="ctr"/>
@@ -8978,6 +8078,11 @@
               </a:rPr>
               <a:t>Services</a:t>
             </a:r>
+            <a:endParaRPr sz="800" b="1">
+              <a:solidFill>
+                <a:srgbClr val="1A3A6E"/>
+              </a:solidFill>
+            </a:endParaRPr>
           </a:p>
           <a:p>
             <a:pPr algn="ctr">
@@ -8993,6 +8098,11 @@
               </a:rPr>
               <a:t>JWT</a:t>
             </a:r>
+            <a:endParaRPr sz="700">
+              <a:solidFill>
+                <a:srgbClr val="333333"/>
+              </a:solidFill>
+            </a:endParaRPr>
           </a:p>
           <a:p>
             <a:pPr algn="ctr">
@@ -9008,6 +8118,11 @@
               </a:rPr>
               <a:t>22Lang</a:t>
             </a:r>
+            <a:endParaRPr sz="700">
+              <a:solidFill>
+                <a:srgbClr val="333333"/>
+              </a:solidFill>
+            </a:endParaRPr>
           </a:p>
           <a:p>
             <a:pPr algn="ctr">
@@ -9023,6 +8138,11 @@
               </a:rPr>
               <a:t>Maps</a:t>
             </a:r>
+            <a:endParaRPr sz="700">
+              <a:solidFill>
+                <a:srgbClr val="333333"/>
+              </a:solidFill>
+            </a:endParaRPr>
           </a:p>
           <a:p>
             <a:pPr algn="ctr">
@@ -9038,6 +8158,11 @@
               </a:rPr>
               <a:t>Fetch</a:t>
             </a:r>
+            <a:endParaRPr sz="700">
+              <a:solidFill>
+                <a:srgbClr val="333333"/>
+              </a:solidFill>
+            </a:endParaRPr>
           </a:p>
         </p:txBody>
       </p:sp>
@@ -9071,6 +8196,11 @@
               </a:rPr>
               <a:t>App Screenshots:</a:t>
             </a:r>
+            <a:endParaRPr sz="1300" b="1">
+              <a:solidFill>
+                <a:srgbClr val="1A3A6E"/>
+              </a:solidFill>
+            </a:endParaRPr>
           </a:p>
         </p:txBody>
       </p:sp>
@@ -9150,6 +8280,11 @@
               </a:rPr>
               <a:t>BIS Offices</a:t>
             </a:r>
+            <a:endParaRPr sz="800">
+              <a:solidFill>
+                <a:srgbClr val="999999"/>
+              </a:solidFill>
+            </a:endParaRPr>
           </a:p>
         </p:txBody>
       </p:sp>
@@ -9229,6 +8364,11 @@
               </a:rPr>
               <a:t>BIS Offices Dark</a:t>
             </a:r>
+            <a:endParaRPr sz="800">
+              <a:solidFill>
+                <a:srgbClr val="999999"/>
+              </a:solidFill>
+            </a:endParaRPr>
           </a:p>
         </p:txBody>
       </p:sp>
@@ -9308,6 +8448,11 @@
               </a:rPr>
               <a:t>Auto-Fetch</a:t>
             </a:r>
+            <a:endParaRPr sz="800">
+              <a:solidFill>
+                <a:srgbClr val="999999"/>
+              </a:solidFill>
+            </a:endParaRPr>
           </a:p>
         </p:txBody>
       </p:sp>
@@ -9387,6 +8532,11 @@
               </a:rPr>
               <a:t>Auto-Fetch Dark</a:t>
             </a:r>
+            <a:endParaRPr sz="800">
+              <a:solidFill>
+                <a:srgbClr val="999999"/>
+              </a:solidFill>
+            </a:endParaRPr>
           </a:p>
         </p:txBody>
       </p:sp>
@@ -9420,6 +8570,11 @@
               </a:rPr>
               <a:t>Key Features:</a:t>
             </a:r>
+            <a:endParaRPr sz="1300" b="1">
+              <a:solidFill>
+                <a:srgbClr val="1A3A6E"/>
+              </a:solidFill>
+            </a:endParaRPr>
           </a:p>
         </p:txBody>
       </p:sp>
@@ -9466,6 +8621,11 @@
               </a:rPr>
               <a:t>22 Indian Languages</a:t>
             </a:r>
+            <a:endParaRPr sz="900" b="1">
+              <a:solidFill>
+                <a:srgbClr val="1A3A6E"/>
+              </a:solidFill>
+            </a:endParaRPr>
           </a:p>
           <a:p>
             <a:pPr>
@@ -9489,6 +8649,11 @@
               </a:rPr>
               <a:t>6-Section AI Response</a:t>
             </a:r>
+            <a:endParaRPr sz="900" b="1">
+              <a:solidFill>
+                <a:srgbClr val="1A3A6E"/>
+              </a:solidFill>
+            </a:endParaRPr>
           </a:p>
           <a:p>
             <a:pPr>
@@ -9512,6 +8677,11 @@
               </a:rPr>
               <a:t>Hallucination-Free RAG</a:t>
             </a:r>
+            <a:endParaRPr sz="900" b="1">
+              <a:solidFill>
+                <a:srgbClr val="1A3A6E"/>
+              </a:solidFill>
+            </a:endParaRPr>
           </a:p>
           <a:p>
             <a:pPr>
@@ -9535,6 +8705,11 @@
               </a:rPr>
               <a:t>Live Auto-Fetch</a:t>
             </a:r>
+            <a:endParaRPr sz="900" b="1">
+              <a:solidFill>
+                <a:srgbClr val="1A3A6E"/>
+              </a:solidFill>
+            </a:endParaRPr>
           </a:p>
           <a:p>
             <a:pPr>
@@ -9558,6 +8733,11 @@
               </a:rPr>
               <a:t>BIS Office Finder</a:t>
             </a:r>
+            <a:endParaRPr sz="900" b="1">
+              <a:solidFill>
+                <a:srgbClr val="1A3A6E"/>
+              </a:solidFill>
+            </a:endParaRPr>
           </a:p>
           <a:p>
             <a:pPr>
@@ -9581,6 +8761,11 @@
               </a:rPr>
               <a:t>Certification Guide</a:t>
             </a:r>
+            <a:endParaRPr sz="900" b="1">
+              <a:solidFill>
+                <a:srgbClr val="1A3A6E"/>
+              </a:solidFill>
+            </a:endParaRPr>
           </a:p>
           <a:p>
             <a:pPr>
@@ -9604,6 +8789,11 @@
               </a:rPr>
               <a:t>Multi-User Auth (JWT)</a:t>
             </a:r>
+            <a:endParaRPr sz="900" b="1">
+              <a:solidFill>
+                <a:srgbClr val="1A3A6E"/>
+              </a:solidFill>
+            </a:endParaRPr>
           </a:p>
           <a:p>
             <a:pPr>
@@ -9627,6 +8817,11 @@
               </a:rPr>
               <a:t>Dark/Light Mode</a:t>
             </a:r>
+            <a:endParaRPr sz="900" b="1">
+              <a:solidFill>
+                <a:srgbClr val="1A3A6E"/>
+              </a:solidFill>
+            </a:endParaRPr>
           </a:p>
         </p:txBody>
       </p:sp>
@@ -9639,7 +8834,7 @@
 </file>
 
 <file path=ppt/slides/slide4.xml><?xml version="1.0" encoding="utf-8"?>
-<p:sld xmlns:a="http://schemas.openxmlformats.org/drawingml/2006/main" xmlns:p="http://schemas.openxmlformats.org/presentationml/2006/main" xmlns:r="http://schemas.openxmlformats.org/officeDocument/2006/relationships">
+<p:sld xmlns:a="http://schemas.openxmlformats.org/drawingml/2006/main" xmlns:r="http://schemas.openxmlformats.org/officeDocument/2006/relationships" xmlns:p="http://schemas.openxmlformats.org/presentationml/2006/main">
   <p:cSld>
     <p:spTree>
       <p:nvGrpSpPr>
@@ -9743,6 +8938,11 @@
               </a:rPr>
               <a:t>Resonant</a:t>
             </a:r>
+            <a:endParaRPr sz="1800" b="1">
+              <a:solidFill>
+                <a:srgbClr val="1A3A6E"/>
+              </a:solidFill>
+            </a:endParaRPr>
           </a:p>
         </p:txBody>
       </p:sp>
@@ -9777,6 +8977,11 @@
               </a:rPr>
               <a:t>MANAKMITRA</a:t>
             </a:r>
+            <a:endParaRPr sz="2800" b="1">
+              <a:solidFill>
+                <a:srgbClr val="1A3A6E"/>
+              </a:solidFill>
+            </a:endParaRPr>
           </a:p>
         </p:txBody>
       </p:sp>
@@ -9828,6 +9033,11 @@
               </a:rPr>
               <a:t>SIH</a:t>
             </a:r>
+            <a:endParaRPr sz="1000" b="1">
+              <a:solidFill>
+                <a:srgbClr val="FFFFFF"/>
+              </a:solidFill>
+            </a:endParaRPr>
           </a:p>
         </p:txBody>
       </p:sp>
@@ -9863,6 +9073,11 @@
               <a:t>SMART INDIA
 HACKATHON 2026</a:t>
             </a:r>
+            <a:endParaRPr sz="1000" b="1">
+              <a:solidFill>
+                <a:srgbClr val="1A3A6E"/>
+              </a:solidFill>
+            </a:endParaRPr>
           </a:p>
         </p:txBody>
       </p:sp>
@@ -9939,6 +9154,11 @@
               </a:rPr>
               <a:t>@SIH Idea submission</a:t>
             </a:r>
+            <a:endParaRPr sz="900">
+              <a:solidFill>
+                <a:srgbClr val="999999"/>
+              </a:solidFill>
+            </a:endParaRPr>
           </a:p>
         </p:txBody>
       </p:sp>
@@ -9973,6 +9193,11 @@
               </a:rPr>
               <a:t>4</a:t>
             </a:r>
+            <a:endParaRPr sz="900">
+              <a:solidFill>
+                <a:srgbClr val="999999"/>
+              </a:solidFill>
+            </a:endParaRPr>
           </a:p>
         </p:txBody>
       </p:sp>
@@ -10006,6 +9231,11 @@
               </a:rPr>
               <a:t>Live Demo - Key Features</a:t>
             </a:r>
+            <a:endParaRPr sz="1600" b="1">
+              <a:solidFill>
+                <a:srgbClr val="1A3A6E"/>
+              </a:solidFill>
+            </a:endParaRPr>
           </a:p>
         </p:txBody>
       </p:sp>
@@ -10125,6 +9355,11 @@
               </a:rPr>
               <a:t>Multilingual AI Chat</a:t>
             </a:r>
+            <a:endParaRPr sz="1100" b="1">
+              <a:solidFill>
+                <a:srgbClr val="1A3A6E"/>
+              </a:solidFill>
+            </a:endParaRPr>
           </a:p>
           <a:p>
             <a:r>
@@ -10135,6 +9370,11 @@
               </a:rPr>
               <a:t>Ask in Hindi, Telugu, Tamil, Bengali or 18 other Indian languages</a:t>
             </a:r>
+            <a:endParaRPr sz="950">
+              <a:solidFill>
+                <a:srgbClr val="333333"/>
+              </a:solidFill>
+            </a:endParaRPr>
           </a:p>
         </p:txBody>
       </p:sp>
@@ -10254,6 +9494,11 @@
               </a:rPr>
               <a:t>6-Section Response</a:t>
             </a:r>
+            <a:endParaRPr sz="1100" b="1">
+              <a:solidFill>
+                <a:srgbClr val="1A3A6E"/>
+              </a:solidFill>
+            </a:endParaRPr>
           </a:p>
           <a:p>
             <a:r>
@@ -10264,6 +9509,11 @@
               </a:rPr>
               <a:t>Standards, testing, offices, legal basis, QC, documents - every time</a:t>
             </a:r>
+            <a:endParaRPr sz="950">
+              <a:solidFill>
+                <a:srgbClr val="333333"/>
+              </a:solidFill>
+            </a:endParaRPr>
           </a:p>
         </p:txBody>
       </p:sp>
@@ -10383,6 +9633,11 @@
               </a:rPr>
               <a:t>Live Auto-Fetch</a:t>
             </a:r>
+            <a:endParaRPr sz="1100" b="1">
+              <a:solidFill>
+                <a:srgbClr val="1A3A6E"/>
+              </a:solidFill>
+            </a:endParaRPr>
           </a:p>
           <a:p>
             <a:r>
@@ -10393,6 +9648,11 @@
               </a:rPr>
               <a:t>Scrapes bis.gov.in for new standards and indexes automatically</a:t>
             </a:r>
+            <a:endParaRPr sz="950">
+              <a:solidFill>
+                <a:srgbClr val="333333"/>
+              </a:solidFill>
+            </a:endParaRPr>
           </a:p>
         </p:txBody>
       </p:sp>
@@ -10512,6 +9772,11 @@
               </a:rPr>
               <a:t>BIS Office Finder</a:t>
             </a:r>
+            <a:endParaRPr sz="1100" b="1">
+              <a:solidFill>
+                <a:srgbClr val="1A3A6E"/>
+              </a:solidFill>
+            </a:endParaRPr>
           </a:p>
           <a:p>
             <a:r>
@@ -10522,6 +9787,11 @@
               </a:rPr>
               <a:t>GPS-based nearest centre with directions and phone numbers</a:t>
             </a:r>
+            <a:endParaRPr sz="950">
+              <a:solidFill>
+                <a:srgbClr val="333333"/>
+              </a:solidFill>
+            </a:endParaRPr>
           </a:p>
         </p:txBody>
       </p:sp>
@@ -10641,6 +9911,11 @@
               </a:rPr>
               <a:t>Certification Guide</a:t>
             </a:r>
+            <a:endParaRPr sz="1100" b="1">
+              <a:solidFill>
+                <a:srgbClr val="1A3A6E"/>
+              </a:solidFill>
+            </a:endParaRPr>
           </a:p>
           <a:p>
             <a:r>
@@ -10651,6 +9926,11 @@
               </a:rPr>
               <a:t>Step-by-step for ISI Mark, Hallmark, Eco Mark, CMVR, MSME Udyam</a:t>
             </a:r>
+            <a:endParaRPr sz="950">
+              <a:solidFill>
+                <a:srgbClr val="333333"/>
+              </a:solidFill>
+            </a:endParaRPr>
           </a:p>
         </p:txBody>
       </p:sp>
@@ -10684,6 +9964,11 @@
               </a:rPr>
               <a:t>App Screenshots:</a:t>
             </a:r>
+            <a:endParaRPr sz="1600" b="1">
+              <a:solidFill>
+                <a:srgbClr val="1A3A6E"/>
+              </a:solidFill>
+            </a:endParaRPr>
           </a:p>
         </p:txBody>
       </p:sp>
@@ -10780,6 +10065,11 @@
               </a:rPr>
               <a:t>  ManakMitra</a:t>
             </a:r>
+            <a:endParaRPr sz="1000" b="1">
+              <a:solidFill>
+                <a:srgbClr val="FFFFFF"/>
+              </a:solidFill>
+            </a:endParaRPr>
           </a:p>
         </p:txBody>
       </p:sp>
@@ -10831,6 +10121,11 @@
               </a:rPr>
               <a:t>What standards for cement?</a:t>
             </a:r>
+            <a:endParaRPr sz="800">
+              <a:solidFill>
+                <a:srgbClr val="FFFFFF"/>
+              </a:solidFill>
+            </a:endParaRPr>
           </a:p>
         </p:txBody>
       </p:sp>
@@ -10872,7 +10167,7 @@
           </a:fontRef>
         </p:style>
         <p:txBody>
-          <a:bodyPr rtlCol="0" anchor="ctr" lIns="76200"/>
+          <a:bodyPr lIns="76200" rtlCol="0" anchor="ctr"/>
           <a:lstStyle/>
           <a:p>
             <a:pPr algn="ctr"/>
@@ -10884,6 +10179,11 @@
               </a:rPr>
               <a:t>1. IS Standards: IS 269, IS 455, IS 8112</a:t>
             </a:r>
+            <a:endParaRPr sz="800" b="1">
+              <a:solidFill>
+                <a:srgbClr val="333333"/>
+              </a:solidFill>
+            </a:endParaRPr>
           </a:p>
         </p:txBody>
       </p:sp>
@@ -10925,7 +10225,7 @@
           </a:fontRef>
         </p:style>
         <p:txBody>
-          <a:bodyPr rtlCol="0" anchor="ctr" lIns="76200"/>
+          <a:bodyPr lIns="76200" rtlCol="0" anchor="ctr"/>
           <a:lstStyle/>
           <a:p>
             <a:pPr algn="ctr"/>
@@ -10937,6 +10237,11 @@
               </a:rPr>
               <a:t>2. Testing: Compressive strength per IS 4031</a:t>
             </a:r>
+            <a:endParaRPr sz="800" b="1">
+              <a:solidFill>
+                <a:srgbClr val="333333"/>
+              </a:solidFill>
+            </a:endParaRPr>
           </a:p>
         </p:txBody>
       </p:sp>
@@ -10978,7 +10283,7 @@
           </a:fontRef>
         </p:style>
         <p:txBody>
-          <a:bodyPr rtlCol="0" anchor="ctr" lIns="76200"/>
+          <a:bodyPr lIns="76200" rtlCol="0" anchor="ctr"/>
           <a:lstStyle/>
           <a:p>
             <a:pPr algn="ctr"/>
@@ -10990,6 +10295,11 @@
               </a:rPr>
               <a:t>3. Where to Test: BIS Lab Delhi 011-2323</a:t>
             </a:r>
+            <a:endParaRPr sz="800" b="1">
+              <a:solidFill>
+                <a:srgbClr val="333333"/>
+              </a:solidFill>
+            </a:endParaRPr>
           </a:p>
         </p:txBody>
       </p:sp>
@@ -11031,7 +10341,7 @@
           </a:fontRef>
         </p:style>
         <p:txBody>
-          <a:bodyPr rtlCol="0" anchor="ctr" lIns="76200"/>
+          <a:bodyPr lIns="76200" rtlCol="0" anchor="ctr"/>
           <a:lstStyle/>
           <a:p>
             <a:pPr algn="ctr"/>
@@ -11043,6 +10353,11 @@
               </a:rPr>
               <a:t>4. Mandatory: Yes, under BIS Act 2016</a:t>
             </a:r>
+            <a:endParaRPr sz="800" b="1">
+              <a:solidFill>
+                <a:srgbClr val="333333"/>
+              </a:solidFill>
+            </a:endParaRPr>
           </a:p>
         </p:txBody>
       </p:sp>
@@ -11139,6 +10454,11 @@
               </a:rPr>
               <a:t>  BIS Standards Library - 28 Standards</a:t>
             </a:r>
+            <a:endParaRPr sz="900" b="1">
+              <a:solidFill>
+                <a:srgbClr val="FFFFFF"/>
+              </a:solidFill>
+            </a:endParaRPr>
           </a:p>
         </p:txBody>
       </p:sp>
@@ -11180,7 +10500,7 @@
           </a:fontRef>
         </p:style>
         <p:txBody>
-          <a:bodyPr rtlCol="0" anchor="ctr" wrap="square" lIns="63500" tIns="38100"/>
+          <a:bodyPr wrap="square" lIns="63500" tIns="38100" rtlCol="0" anchor="ctr"/>
           <a:lstStyle/>
           <a:p>
             <a:pPr algn="ctr"/>
@@ -11192,6 +10512,11 @@
               </a:rPr>
               <a:t>CEMENT</a:t>
             </a:r>
+            <a:endParaRPr sz="700" b="1">
+              <a:solidFill>
+                <a:srgbClr val="FF6B35"/>
+              </a:solidFill>
+            </a:endParaRPr>
           </a:p>
           <a:p>
             <a:r>
@@ -11202,6 +10527,11 @@
               </a:rPr>
               <a:t>IS 269</a:t>
             </a:r>
+            <a:endParaRPr sz="1100" b="1">
+              <a:solidFill>
+                <a:srgbClr val="1A3A6E"/>
+              </a:solidFill>
+            </a:endParaRPr>
           </a:p>
           <a:p>
             <a:r>
@@ -11212,6 +10542,11 @@
               </a:rPr>
               <a:t>OPC</a:t>
             </a:r>
+            <a:endParaRPr sz="800">
+              <a:solidFill>
+                <a:srgbClr val="333333"/>
+              </a:solidFill>
+            </a:endParaRPr>
           </a:p>
         </p:txBody>
       </p:sp>
@@ -11253,7 +10588,7 @@
           </a:fontRef>
         </p:style>
         <p:txBody>
-          <a:bodyPr rtlCol="0" anchor="ctr" wrap="square" lIns="63500" tIns="38100"/>
+          <a:bodyPr wrap="square" lIns="63500" tIns="38100" rtlCol="0" anchor="ctr"/>
           <a:lstStyle/>
           <a:p>
             <a:pPr algn="ctr"/>
@@ -11265,6 +10600,11 @@
               </a:rPr>
               <a:t>STEEL</a:t>
             </a:r>
+            <a:endParaRPr sz="700" b="1">
+              <a:solidFill>
+                <a:srgbClr val="FF6B35"/>
+              </a:solidFill>
+            </a:endParaRPr>
           </a:p>
           <a:p>
             <a:r>
@@ -11275,6 +10615,11 @@
               </a:rPr>
               <a:t>IS 2062</a:t>
             </a:r>
+            <a:endParaRPr sz="1100" b="1">
+              <a:solidFill>
+                <a:srgbClr val="1A3A6E"/>
+              </a:solidFill>
+            </a:endParaRPr>
           </a:p>
           <a:p>
             <a:r>
@@ -11285,6 +10630,11 @@
               </a:rPr>
               <a:t>Structural</a:t>
             </a:r>
+            <a:endParaRPr sz="800">
+              <a:solidFill>
+                <a:srgbClr val="333333"/>
+              </a:solidFill>
+            </a:endParaRPr>
           </a:p>
         </p:txBody>
       </p:sp>
@@ -11326,7 +10676,7 @@
           </a:fontRef>
         </p:style>
         <p:txBody>
-          <a:bodyPr rtlCol="0" anchor="ctr" wrap="square" lIns="63500" tIns="38100"/>
+          <a:bodyPr wrap="square" lIns="63500" tIns="38100" rtlCol="0" anchor="ctr"/>
           <a:lstStyle/>
           <a:p>
             <a:pPr algn="ctr"/>
@@ -11338,6 +10688,11 @@
               </a:rPr>
               <a:t>ELECTRICAL</a:t>
             </a:r>
+            <a:endParaRPr sz="700" b="1">
+              <a:solidFill>
+                <a:srgbClr val="FF6B35"/>
+              </a:solidFill>
+            </a:endParaRPr>
           </a:p>
           <a:p>
             <a:r>
@@ -11348,6 +10703,11 @@
               </a:rPr>
               <a:t>IS 302</a:t>
             </a:r>
+            <a:endParaRPr sz="1100" b="1">
+              <a:solidFill>
+                <a:srgbClr val="1A3A6E"/>
+              </a:solidFill>
+            </a:endParaRPr>
           </a:p>
           <a:p>
             <a:r>
@@ -11358,6 +10718,11 @@
               </a:rPr>
               <a:t>Appliances</a:t>
             </a:r>
+            <a:endParaRPr sz="800">
+              <a:solidFill>
+                <a:srgbClr val="333333"/>
+              </a:solidFill>
+            </a:endParaRPr>
           </a:p>
         </p:txBody>
       </p:sp>
@@ -11399,7 +10764,7 @@
           </a:fontRef>
         </p:style>
         <p:txBody>
-          <a:bodyPr rtlCol="0" anchor="ctr" wrap="square" lIns="63500" tIns="38100"/>
+          <a:bodyPr wrap="square" lIns="63500" tIns="38100" rtlCol="0" anchor="ctr"/>
           <a:lstStyle/>
           <a:p>
             <a:pPr algn="ctr"/>
@@ -11411,6 +10776,11 @@
               </a:rPr>
               <a:t>FOOD</a:t>
             </a:r>
+            <a:endParaRPr sz="700" b="1">
+              <a:solidFill>
+                <a:srgbClr val="FF6B35"/>
+              </a:solidFill>
+            </a:endParaRPr>
           </a:p>
           <a:p>
             <a:r>
@@ -11421,6 +10791,11 @@
               </a:rPr>
               <a:t>IS 14543</a:t>
             </a:r>
+            <a:endParaRPr sz="1100" b="1">
+              <a:solidFill>
+                <a:srgbClr val="1A3A6E"/>
+              </a:solidFill>
+            </a:endParaRPr>
           </a:p>
           <a:p>
             <a:r>
@@ -11431,6 +10806,11 @@
               </a:rPr>
               <a:t>Water</a:t>
             </a:r>
+            <a:endParaRPr sz="800">
+              <a:solidFill>
+                <a:srgbClr val="333333"/>
+              </a:solidFill>
+            </a:endParaRPr>
           </a:p>
         </p:txBody>
       </p:sp>
@@ -11472,7 +10852,7 @@
           </a:fontRef>
         </p:style>
         <p:txBody>
-          <a:bodyPr rtlCol="0" anchor="ctr" wrap="square" lIns="63500" tIns="38100"/>
+          <a:bodyPr wrap="square" lIns="63500" tIns="38100" rtlCol="0" anchor="ctr"/>
           <a:lstStyle/>
           <a:p>
             <a:pPr algn="ctr"/>
@@ -11484,6 +10864,11 @@
               </a:rPr>
               <a:t>ELECTRICAL</a:t>
             </a:r>
+            <a:endParaRPr sz="700" b="1">
+              <a:solidFill>
+                <a:srgbClr val="FF6B35"/>
+              </a:solidFill>
+            </a:endParaRPr>
           </a:p>
           <a:p>
             <a:r>
@@ -11494,6 +10879,11 @@
               </a:rPr>
               <a:t>IS 15556</a:t>
             </a:r>
+            <a:endParaRPr sz="1100" b="1">
+              <a:solidFill>
+                <a:srgbClr val="1A3A6E"/>
+              </a:solidFill>
+            </a:endParaRPr>
           </a:p>
           <a:p>
             <a:r>
@@ -11504,6 +10894,11 @@
               </a:rPr>
               <a:t>LED</a:t>
             </a:r>
+            <a:endParaRPr sz="800">
+              <a:solidFill>
+                <a:srgbClr val="333333"/>
+              </a:solidFill>
+            </a:endParaRPr>
           </a:p>
         </p:txBody>
       </p:sp>
@@ -11545,7 +10940,7 @@
           </a:fontRef>
         </p:style>
         <p:txBody>
-          <a:bodyPr rtlCol="0" anchor="ctr" wrap="square" lIns="63500" tIns="38100"/>
+          <a:bodyPr wrap="square" lIns="63500" tIns="38100" rtlCol="0" anchor="ctr"/>
           <a:lstStyle/>
           <a:p>
             <a:pPr algn="ctr"/>
@@ -11557,6 +10952,11 @@
               </a:rPr>
               <a:t>LEATHER</a:t>
             </a:r>
+            <a:endParaRPr sz="700" b="1">
+              <a:solidFill>
+                <a:srgbClr val="FF6B35"/>
+              </a:solidFill>
+            </a:endParaRPr>
           </a:p>
           <a:p>
             <a:r>
@@ -11567,6 +10967,11 @@
               </a:rPr>
               <a:t>IS 3289</a:t>
             </a:r>
+            <a:endParaRPr sz="1100" b="1">
+              <a:solidFill>
+                <a:srgbClr val="1A3A6E"/>
+              </a:solidFill>
+            </a:endParaRPr>
           </a:p>
           <a:p>
             <a:r>
@@ -11577,6 +10982,11 @@
               </a:rPr>
               <a:t>Finished</a:t>
             </a:r>
+            <a:endParaRPr sz="800">
+              <a:solidFill>
+                <a:srgbClr val="333333"/>
+              </a:solidFill>
+            </a:endParaRPr>
           </a:p>
         </p:txBody>
       </p:sp>
@@ -11589,7 +10999,7 @@
 </file>
 
 <file path=ppt/slides/slide5.xml><?xml version="1.0" encoding="utf-8"?>
-<p:sld xmlns:a="http://schemas.openxmlformats.org/drawingml/2006/main" xmlns:p="http://schemas.openxmlformats.org/presentationml/2006/main" xmlns:r="http://schemas.openxmlformats.org/officeDocument/2006/relationships">
+<p:sld xmlns:a="http://schemas.openxmlformats.org/drawingml/2006/main" xmlns:r="http://schemas.openxmlformats.org/officeDocument/2006/relationships" xmlns:p="http://schemas.openxmlformats.org/presentationml/2006/main">
   <p:cSld>
     <p:spTree>
       <p:nvGrpSpPr>
@@ -11693,6 +11103,11 @@
               </a:rPr>
               <a:t>Resonant</a:t>
             </a:r>
+            <a:endParaRPr sz="1800" b="1">
+              <a:solidFill>
+                <a:srgbClr val="1A3A6E"/>
+              </a:solidFill>
+            </a:endParaRPr>
           </a:p>
         </p:txBody>
       </p:sp>
@@ -11727,6 +11142,11 @@
               </a:rPr>
               <a:t>MANAKMITRA</a:t>
             </a:r>
+            <a:endParaRPr sz="2800" b="1">
+              <a:solidFill>
+                <a:srgbClr val="1A3A6E"/>
+              </a:solidFill>
+            </a:endParaRPr>
           </a:p>
         </p:txBody>
       </p:sp>
@@ -11778,6 +11198,11 @@
               </a:rPr>
               <a:t>SIH</a:t>
             </a:r>
+            <a:endParaRPr sz="1000" b="1">
+              <a:solidFill>
+                <a:srgbClr val="FFFFFF"/>
+              </a:solidFill>
+            </a:endParaRPr>
           </a:p>
         </p:txBody>
       </p:sp>
@@ -11813,6 +11238,11 @@
               <a:t>SMART INDIA
 HACKATHON 2026</a:t>
             </a:r>
+            <a:endParaRPr sz="1000" b="1">
+              <a:solidFill>
+                <a:srgbClr val="1A3A6E"/>
+              </a:solidFill>
+            </a:endParaRPr>
           </a:p>
         </p:txBody>
       </p:sp>
@@ -11889,6 +11319,11 @@
               </a:rPr>
               <a:t>@SIH Idea submission</a:t>
             </a:r>
+            <a:endParaRPr sz="900">
+              <a:solidFill>
+                <a:srgbClr val="999999"/>
+              </a:solidFill>
+            </a:endParaRPr>
           </a:p>
         </p:txBody>
       </p:sp>
@@ -11923,6 +11358,11 @@
               </a:rPr>
               <a:t>5</a:t>
             </a:r>
+            <a:endParaRPr sz="900">
+              <a:solidFill>
+                <a:srgbClr val="999999"/>
+              </a:solidFill>
+            </a:endParaRPr>
           </a:p>
         </p:txBody>
       </p:sp>
@@ -11956,6 +11396,11 @@
               </a:rPr>
               <a:t>FEASIBILITY AND VIABILITY</a:t>
             </a:r>
+            <a:endParaRPr sz="2200" b="1">
+              <a:solidFill>
+                <a:srgbClr val="1A3A6E"/>
+              </a:solidFill>
+            </a:endParaRPr>
           </a:p>
         </p:txBody>
       </p:sp>
@@ -11989,6 +11434,11 @@
               </a:rPr>
               <a:t>Feasibility</a:t>
             </a:r>
+            <a:endParaRPr sz="1800" b="1">
+              <a:solidFill>
+                <a:srgbClr val="1565C0"/>
+              </a:solidFill>
+            </a:endParaRPr>
           </a:p>
         </p:txBody>
       </p:sp>
@@ -12043,6 +11493,11 @@
               </a:rPr>
               <a:t> Proven tech stack - React, FastAPI, ONNX, FAISS, Gemini API. Quick to build and deploy MVP.</a:t>
             </a:r>
+            <a:endParaRPr sz="1200">
+              <a:solidFill>
+                <a:srgbClr val="333333"/>
+              </a:solidFill>
+            </a:endParaRPr>
           </a:p>
           <a:p>
             <a:pPr>
@@ -12074,6 +11529,11 @@
               </a:rPr>
               <a:t> BIS standards publicly available on bis.gov.in. 28 standards indexed, expandable to 28,000+.</a:t>
             </a:r>
+            <a:endParaRPr sz="1200">
+              <a:solidFill>
+                <a:srgbClr val="333333"/>
+              </a:solidFill>
+            </a:endParaRPr>
           </a:p>
           <a:p>
             <a:pPr>
@@ -12105,6 +11565,11 @@
               </a:rPr>
               <a:t> Open-source tools, free cloud tiers (Render + Vercel), zero upfront cost.</a:t>
             </a:r>
+            <a:endParaRPr sz="1200">
+              <a:solidFill>
+                <a:srgbClr val="333333"/>
+              </a:solidFill>
+            </a:endParaRPr>
           </a:p>
           <a:p>
             <a:pPr>
@@ -12136,6 +11601,11 @@
               </a:rPr>
               <a:t> deep-translator supports 22 Indian languages. Auto-detect, translate, process, translate back.</a:t>
             </a:r>
+            <a:endParaRPr sz="1200">
+              <a:solidFill>
+                <a:srgbClr val="333333"/>
+              </a:solidFill>
+            </a:endParaRPr>
           </a:p>
           <a:p>
             <a:pPr>
@@ -12167,6 +11637,11 @@
               </a:rPr>
               <a:t> ChatGPT-like interface - no training needed. MSMEs can ask in their own language.</a:t>
             </a:r>
+            <a:endParaRPr sz="1200">
+              <a:solidFill>
+                <a:srgbClr val="333333"/>
+              </a:solidFill>
+            </a:endParaRPr>
           </a:p>
           <a:p>
             <a:pPr>
@@ -12198,6 +11673,11 @@
               </a:rPr>
               <a:t> Modular RAG architecture. Adding new standards = adding new PDF files. No code changes.</a:t>
             </a:r>
+            <a:endParaRPr sz="1200">
+              <a:solidFill>
+                <a:srgbClr val="333333"/>
+              </a:solidFill>
+            </a:endParaRPr>
           </a:p>
         </p:txBody>
       </p:sp>
@@ -12274,6 +11754,11 @@
               </a:rPr>
               <a:t>Viability</a:t>
             </a:r>
+            <a:endParaRPr sz="1800" b="1">
+              <a:solidFill>
+                <a:srgbClr val="2E7D32"/>
+              </a:solidFill>
+            </a:endParaRPr>
           </a:p>
         </p:txBody>
       </p:sp>
@@ -12285,8 +11770,8 @@
         </p:nvSpPr>
         <p:spPr>
           <a:xfrm>
-            <a:off x="457200" y="4846320"/>
-            <a:ext cx="5303520" cy="1645920"/>
+            <a:off x="550545" y="5234305"/>
+            <a:ext cx="5303520" cy="275590"/>
           </a:xfrm>
           <a:prstGeom prst="rect">
             <a:avLst/>
@@ -12313,176 +11798,42 @@
               <a:t>&gt; </a:t>
             </a:r>
             <a:r>
+              <a:rPr lang="en-US" sz="1100" b="1">
+                <a:solidFill>
+                  <a:srgbClr val="FF6B35"/>
+                </a:solidFill>
+              </a:rPr>
+              <a:t>Live Prototype</a:t>
+            </a:r>
+            <a:r>
               <a:rPr sz="1200" b="1">
                 <a:solidFill>
                   <a:srgbClr val="1A3A6E"/>
                 </a:solidFill>
               </a:rPr>
-              <a:t>Market Demand:</a:t>
-            </a:r>
-            <a:r>
-              <a:rPr sz="1200">
-                <a:solidFill>
-                  <a:srgbClr val="333333"/>
-                </a:solidFill>
-              </a:rPr>
-              <a:t> 63M+ MSMEs in India struggle with BIS compliance. No free AI tool exists for this.</a:t>
-            </a:r>
-          </a:p>
-          <a:p>
-            <a:pPr>
-              <a:spcAft>
-                <a:spcPts val="500"/>
-              </a:spcAft>
-            </a:pPr>
-            <a:r>
-              <a:rPr sz="1100" b="1">
-                <a:solidFill>
-                  <a:srgbClr val="FF6B35"/>
-                </a:solidFill>
-              </a:rPr>
-              <a:t>&gt; </a:t>
-            </a:r>
-            <a:r>
-              <a:rPr sz="1200" b="1">
+              <a:t>:</a:t>
+            </a:r>
+            <a:r>
+              <a:rPr lang="en-US" sz="1200" b="1">
                 <a:solidFill>
                   <a:srgbClr val="1A3A6E"/>
                 </a:solidFill>
               </a:rPr>
-              <a:t>Adoption:</a:t>
-            </a:r>
-            <a:r>
-              <a:rPr sz="1200">
-                <a:solidFill>
-                  <a:srgbClr val="333333"/>
-                </a:solidFill>
-              </a:rPr>
-              <a:t> WhatsApp-like chat interface - familiar to Indian users. No app download needed (web-based).</a:t>
-            </a:r>
-          </a:p>
-          <a:p>
-            <a:pPr>
-              <a:spcAft>
-                <a:spcPts val="500"/>
-              </a:spcAft>
-            </a:pPr>
-            <a:r>
-              <a:rPr sz="1100" b="1">
-                <a:solidFill>
-                  <a:srgbClr val="FF6B35"/>
-                </a:solidFill>
-              </a:rPr>
-              <a:t>&gt; </a:t>
-            </a:r>
-            <a:r>
-              <a:rPr sz="1200" b="1">
+              <a:t> </a:t>
+            </a:r>
+            <a:r>
+              <a:rPr lang="en-US" altLang="en-US" sz="1200" b="1">
                 <a:solidFill>
                   <a:srgbClr val="1A3A6E"/>
                 </a:solidFill>
               </a:rPr>
-              <a:t>Sustainability:</a:t>
-            </a:r>
-            <a:r>
-              <a:rPr sz="1200">
-                <a:solidFill>
-                  <a:srgbClr val="333333"/>
-                </a:solidFill>
-              </a:rPr>
-              <a:t> Freemium model - free for individuals, paid plans for MSMEs and enterprises.</a:t>
-            </a:r>
-          </a:p>
-          <a:p>
-            <a:pPr>
-              <a:spcAft>
-                <a:spcPts val="500"/>
-              </a:spcAft>
-            </a:pPr>
-            <a:r>
-              <a:rPr sz="1100" b="1">
-                <a:solidFill>
-                  <a:srgbClr val="FF6B35"/>
-                </a:solidFill>
-              </a:rPr>
-              <a:t>&gt; </a:t>
-            </a:r>
-            <a:r>
-              <a:rPr sz="1200" b="1">
-                <a:solidFill>
-                  <a:srgbClr val="1A3A6E"/>
-                </a:solidFill>
-              </a:rPr>
-              <a:t>Trust:</a:t>
-            </a:r>
-            <a:r>
-              <a:rPr sz="1200">
-                <a:solidFill>
-                  <a:srgbClr val="333333"/>
-                </a:solidFill>
-              </a:rPr>
-              <a:t> Source-grounded RAG ensures responses cite official BIS documents. No hallucinations.</a:t>
-            </a:r>
-          </a:p>
-          <a:p>
-            <a:pPr>
-              <a:spcAft>
-                <a:spcPts val="500"/>
-              </a:spcAft>
-            </a:pPr>
-            <a:r>
-              <a:rPr sz="1100" b="1">
-                <a:solidFill>
-                  <a:srgbClr val="FF6B35"/>
-                </a:solidFill>
-              </a:rPr>
-              <a:t>&gt; </a:t>
-            </a:r>
-            <a:r>
-              <a:rPr sz="1200" b="1">
-                <a:solidFill>
-                  <a:srgbClr val="1A3A6E"/>
-                </a:solidFill>
-              </a:rPr>
-              <a:t>Government Alignment:</a:t>
-            </a:r>
-            <a:r>
-              <a:rPr sz="1200">
-                <a:solidFill>
-                  <a:srgbClr val="333333"/>
-                </a:solidFill>
-              </a:rPr>
-              <a:t> Supports BIS Act 2016 compliance goals. Can integrate with MSME Samadhaan scheme.</a:t>
-            </a:r>
-          </a:p>
-          <a:p>
-            <a:pPr>
-              <a:spcAft>
-                <a:spcPts val="500"/>
-              </a:spcAft>
-            </a:pPr>
-            <a:r>
-              <a:rPr sz="1100" b="1">
-                <a:solidFill>
-                  <a:srgbClr val="FF6B35"/>
-                </a:solidFill>
-              </a:rPr>
-              <a:t>&gt; </a:t>
-            </a:r>
-            <a:r>
-              <a:rPr sz="1200" b="1">
-                <a:solidFill>
-                  <a:srgbClr val="1A3A6E"/>
-                </a:solidFill>
-              </a:rPr>
-              <a:t>Partnerships:</a:t>
-            </a:r>
-            <a:r>
-              <a:rPr sz="1200">
-                <a:solidFill>
-                  <a:srgbClr val="333333"/>
-                </a:solidFill>
-              </a:rPr>
-              <a:t> Potential BIS official data provider status. Revenue share on certified leads.</a:t>
-            </a:r>
+              <a:t>https://sih2026-bis-assistant-ebon.vercel.app/</a:t>
+            </a:r>
+            <a:endParaRPr lang="en-US" altLang="en-US" sz="1200" b="1">
+              <a:solidFill>
+                <a:srgbClr val="1A3A6E"/>
+              </a:solidFill>
+            </a:endParaRPr>
           </a:p>
         </p:txBody>
       </p:sp>
@@ -12602,6 +11953,11 @@
               </a:rPr>
               <a:t>Use Cases</a:t>
             </a:r>
+            <a:endParaRPr sz="1800" b="1">
+              <a:solidFill>
+                <a:srgbClr val="1A3A6E"/>
+              </a:solidFill>
+            </a:endParaRPr>
           </a:p>
         </p:txBody>
       </p:sp>
@@ -12651,6 +12007,7 @@
               <a:rPr sz="1600"/>
               <a:t>🏭</a:t>
             </a:r>
+            <a:endParaRPr sz="1600"/>
           </a:p>
         </p:txBody>
       </p:sp>
@@ -12685,6 +12042,11 @@
               </a:rPr>
               <a:t>MSME Owner</a:t>
             </a:r>
+            <a:endParaRPr sz="800" b="1">
+              <a:solidFill>
+                <a:srgbClr val="1A3A6E"/>
+              </a:solidFill>
+            </a:endParaRPr>
           </a:p>
         </p:txBody>
       </p:sp>
@@ -12720,6 +12082,11 @@
               <a:t>Quick standards check
 Certification guidance</a:t>
             </a:r>
+            <a:endParaRPr sz="700">
+              <a:solidFill>
+                <a:srgbClr val="333333"/>
+              </a:solidFill>
+            </a:endParaRPr>
           </a:p>
         </p:txBody>
       </p:sp>
@@ -12769,6 +12136,7 @@
               <a:rPr sz="1600"/>
               <a:t>🔬</a:t>
             </a:r>
+            <a:endParaRPr sz="1600"/>
           </a:p>
         </p:txBody>
       </p:sp>
@@ -12803,6 +12171,11 @@
               </a:rPr>
               <a:t>Manufacturer</a:t>
             </a:r>
+            <a:endParaRPr sz="800" b="1">
+              <a:solidFill>
+                <a:srgbClr val="1A3A6E"/>
+              </a:solidFill>
+            </a:endParaRPr>
           </a:p>
         </p:txBody>
       </p:sp>
@@ -12838,6 +12211,11 @@
               <a:t>Test requirements
 Lab locations</a:t>
             </a:r>
+            <a:endParaRPr sz="700">
+              <a:solidFill>
+                <a:srgbClr val="333333"/>
+              </a:solidFill>
+            </a:endParaRPr>
           </a:p>
         </p:txBody>
       </p:sp>
@@ -12887,6 +12265,7 @@
               <a:rPr sz="1600"/>
               <a:t>👩‍💼</a:t>
             </a:r>
+            <a:endParaRPr sz="1600"/>
           </a:p>
         </p:txBody>
       </p:sp>
@@ -12921,6 +12300,11 @@
               </a:rPr>
               <a:t>Quality Manager</a:t>
             </a:r>
+            <a:endParaRPr sz="800" b="1">
+              <a:solidFill>
+                <a:srgbClr val="1A3A6E"/>
+              </a:solidFill>
+            </a:endParaRPr>
           </a:p>
         </p:txBody>
       </p:sp>
@@ -12956,6 +12340,11 @@
               <a:t>Standards updates
 Compliance tracking</a:t>
             </a:r>
+            <a:endParaRPr sz="700">
+              <a:solidFill>
+                <a:srgbClr val="333333"/>
+              </a:solidFill>
+            </a:endParaRPr>
           </a:p>
         </p:txBody>
       </p:sp>
@@ -13005,6 +12394,7 @@
               <a:rPr sz="1600"/>
               <a:t>🏛️</a:t>
             </a:r>
+            <a:endParaRPr sz="1600"/>
           </a:p>
         </p:txBody>
       </p:sp>
@@ -13039,6 +12429,11 @@
               </a:rPr>
               <a:t>Government</a:t>
             </a:r>
+            <a:endParaRPr sz="800" b="1">
+              <a:solidFill>
+                <a:srgbClr val="1A3A6E"/>
+              </a:solidFill>
+            </a:endParaRPr>
           </a:p>
         </p:txBody>
       </p:sp>
@@ -13074,6 +12469,11 @@
               <a:t>BIS compliance awareness
 Policy-aligned guidance</a:t>
             </a:r>
+            <a:endParaRPr sz="700">
+              <a:solidFill>
+                <a:srgbClr val="333333"/>
+              </a:solidFill>
+            </a:endParaRPr>
           </a:p>
         </p:txBody>
       </p:sp>
@@ -13123,6 +12523,7 @@
               <a:rPr sz="1600"/>
               <a:t>🧪</a:t>
             </a:r>
+            <a:endParaRPr sz="1600"/>
           </a:p>
         </p:txBody>
       </p:sp>
@@ -13157,6 +12558,11 @@
               </a:rPr>
               <a:t>Testing Labs</a:t>
             </a:r>
+            <a:endParaRPr sz="800" b="1">
+              <a:solidFill>
+                <a:srgbClr val="1A3A6E"/>
+              </a:solidFill>
+            </a:endParaRPr>
           </a:p>
         </p:txBody>
       </p:sp>
@@ -13192,6 +12598,11 @@
               <a:t>Reference standards
 Client guidance</a:t>
             </a:r>
+            <a:endParaRPr sz="700">
+              <a:solidFill>
+                <a:srgbClr val="333333"/>
+              </a:solidFill>
+            </a:endParaRPr>
           </a:p>
         </p:txBody>
       </p:sp>
@@ -13268,6 +12679,11 @@
               </a:rPr>
               <a:t>Challenges &amp; Mitigations</a:t>
             </a:r>
+            <a:endParaRPr sz="1600" b="1">
+              <a:solidFill>
+                <a:srgbClr val="1A3A6E"/>
+              </a:solidFill>
+            </a:endParaRPr>
           </a:p>
         </p:txBody>
       </p:sp>
@@ -13317,6 +12733,7 @@
               <a:rPr sz="1400"/>
               <a:t>🔒</a:t>
             </a:r>
+            <a:endParaRPr sz="1400"/>
           </a:p>
         </p:txBody>
       </p:sp>
@@ -13351,6 +12768,11 @@
               </a:rPr>
               <a:t>Data Security</a:t>
             </a:r>
+            <a:endParaRPr sz="800" b="1">
+              <a:solidFill>
+                <a:srgbClr val="1A3A6E"/>
+              </a:solidFill>
+            </a:endParaRPr>
           </a:p>
         </p:txBody>
       </p:sp>
@@ -13386,6 +12808,11 @@
               <a:t>JWT auth + bcrypt
 No PII stored server-side</a:t>
             </a:r>
+            <a:endParaRPr sz="700">
+              <a:solidFill>
+                <a:srgbClr val="333333"/>
+              </a:solidFill>
+            </a:endParaRPr>
           </a:p>
         </p:txBody>
       </p:sp>
@@ -13435,6 +12862,7 @@
               <a:rPr sz="1400"/>
               <a:t>📈</a:t>
             </a:r>
+            <a:endParaRPr sz="1400"/>
           </a:p>
         </p:txBody>
       </p:sp>
@@ -13469,6 +12897,11 @@
               </a:rPr>
               <a:t>User Adoption</a:t>
             </a:r>
+            <a:endParaRPr sz="800" b="1">
+              <a:solidFill>
+                <a:srgbClr val="1A3A6E"/>
+              </a:solidFill>
+            </a:endParaRPr>
           </a:p>
         </p:txBody>
       </p:sp>
@@ -13504,6 +12937,11 @@
               <a:t>WhatsApp-like UI
 No training needed</a:t>
             </a:r>
+            <a:endParaRPr sz="700">
+              <a:solidFill>
+                <a:srgbClr val="333333"/>
+              </a:solidFill>
+            </a:endParaRPr>
           </a:p>
         </p:txBody>
       </p:sp>
@@ -13553,6 +12991,7 @@
               <a:rPr sz="1400"/>
               <a:t>🌐</a:t>
             </a:r>
+            <a:endParaRPr sz="1400"/>
           </a:p>
         </p:txBody>
       </p:sp>
@@ -13587,6 +13026,11 @@
               </a:rPr>
               <a:t>Scalability</a:t>
             </a:r>
+            <a:endParaRPr sz="800" b="1">
+              <a:solidFill>
+                <a:srgbClr val="1A3A6E"/>
+              </a:solidFill>
+            </a:endParaRPr>
           </a:p>
         </p:txBody>
       </p:sp>
@@ -13622,6 +13066,11 @@
               <a:t>Modular RAG design
 Add standards = add PDFs</a:t>
             </a:r>
+            <a:endParaRPr sz="700">
+              <a:solidFill>
+                <a:srgbClr val="333333"/>
+              </a:solidFill>
+            </a:endParaRPr>
           </a:p>
         </p:txBody>
       </p:sp>
@@ -13671,6 +13120,7 @@
               <a:rPr sz="1400"/>
               <a:t>🗣️</a:t>
             </a:r>
+            <a:endParaRPr sz="1400"/>
           </a:p>
         </p:txBody>
       </p:sp>
@@ -13705,6 +13155,11 @@
               </a:rPr>
               <a:t>Language Accuracy</a:t>
             </a:r>
+            <a:endParaRPr sz="800" b="1">
+              <a:solidFill>
+                <a:srgbClr val="1A3A6E"/>
+              </a:solidFill>
+            </a:endParaRPr>
           </a:p>
         </p:txBody>
       </p:sp>
@@ -13740,6 +13195,11 @@
               <a:t>Auto-detect + translate
 22 Indian languages</a:t>
             </a:r>
+            <a:endParaRPr sz="700">
+              <a:solidFill>
+                <a:srgbClr val="333333"/>
+              </a:solidFill>
+            </a:endParaRPr>
           </a:p>
         </p:txBody>
       </p:sp>
@@ -13789,6 +13249,7 @@
               <a:rPr sz="1400"/>
               <a:t>🔄</a:t>
             </a:r>
+            <a:endParaRPr sz="1400"/>
           </a:p>
         </p:txBody>
       </p:sp>
@@ -13823,6 +13284,11 @@
               </a:rPr>
               <a:t>Data Freshness</a:t>
             </a:r>
+            <a:endParaRPr sz="800" b="1">
+              <a:solidFill>
+                <a:srgbClr val="1A3A6E"/>
+              </a:solidFill>
+            </a:endParaRPr>
           </a:p>
         </p:txBody>
       </p:sp>
@@ -13858,6 +13324,11 @@
               <a:t>Live auto-fetch pipeline
 Scrapes bis.gov.in</a:t>
             </a:r>
+            <a:endParaRPr sz="700">
+              <a:solidFill>
+                <a:srgbClr val="333333"/>
+              </a:solidFill>
+            </a:endParaRPr>
           </a:p>
         </p:txBody>
       </p:sp>
@@ -13870,7 +13341,7 @@
 </file>
 
 <file path=ppt/slides/slide6.xml><?xml version="1.0" encoding="utf-8"?>
-<p:sld xmlns:a="http://schemas.openxmlformats.org/drawingml/2006/main" xmlns:p="http://schemas.openxmlformats.org/presentationml/2006/main" xmlns:r="http://schemas.openxmlformats.org/officeDocument/2006/relationships">
+<p:sld xmlns:a="http://schemas.openxmlformats.org/drawingml/2006/main" xmlns:r="http://schemas.openxmlformats.org/officeDocument/2006/relationships" xmlns:p="http://schemas.openxmlformats.org/presentationml/2006/main">
   <p:cSld>
     <p:spTree>
       <p:nvGrpSpPr>
@@ -13974,6 +13445,11 @@
               </a:rPr>
               <a:t>Resonant</a:t>
             </a:r>
+            <a:endParaRPr sz="1800" b="1">
+              <a:solidFill>
+                <a:srgbClr val="1A3A6E"/>
+              </a:solidFill>
+            </a:endParaRPr>
           </a:p>
         </p:txBody>
       </p:sp>
@@ -14008,6 +13484,11 @@
               </a:rPr>
               <a:t>MANAKMITRA</a:t>
             </a:r>
+            <a:endParaRPr sz="2800" b="1">
+              <a:solidFill>
+                <a:srgbClr val="1A3A6E"/>
+              </a:solidFill>
+            </a:endParaRPr>
           </a:p>
         </p:txBody>
       </p:sp>
@@ -14059,6 +13540,11 @@
               </a:rPr>
               <a:t>SIH</a:t>
             </a:r>
+            <a:endParaRPr sz="1000" b="1">
+              <a:solidFill>
+                <a:srgbClr val="FFFFFF"/>
+              </a:solidFill>
+            </a:endParaRPr>
           </a:p>
         </p:txBody>
       </p:sp>
@@ -14094,6 +13580,11 @@
               <a:t>SMART INDIA
 HACKATHON 2026</a:t>
             </a:r>
+            <a:endParaRPr sz="1000" b="1">
+              <a:solidFill>
+                <a:srgbClr val="1A3A6E"/>
+              </a:solidFill>
+            </a:endParaRPr>
           </a:p>
         </p:txBody>
       </p:sp>
@@ -14170,6 +13661,11 @@
               </a:rPr>
               <a:t>@SIH Idea submission</a:t>
             </a:r>
+            <a:endParaRPr sz="900">
+              <a:solidFill>
+                <a:srgbClr val="999999"/>
+              </a:solidFill>
+            </a:endParaRPr>
           </a:p>
         </p:txBody>
       </p:sp>
@@ -14204,6 +13700,11 @@
               </a:rPr>
               <a:t>5</a:t>
             </a:r>
+            <a:endParaRPr sz="900">
+              <a:solidFill>
+                <a:srgbClr val="999999"/>
+              </a:solidFill>
+            </a:endParaRPr>
           </a:p>
         </p:txBody>
       </p:sp>
@@ -14237,6 +13738,11 @@
               </a:rPr>
               <a:t>Impact &amp; Target Users</a:t>
             </a:r>
+            <a:endParaRPr sz="1600" b="1">
+              <a:solidFill>
+                <a:srgbClr val="1A3A6E"/>
+              </a:solidFill>
+            </a:endParaRPr>
           </a:p>
         </p:txBody>
       </p:sp>
@@ -14288,6 +13794,11 @@
               </a:rPr>
               <a:t>63M+</a:t>
             </a:r>
+            <a:endParaRPr sz="2400" b="1">
+              <a:solidFill>
+                <a:srgbClr val="FF6B35"/>
+              </a:solidFill>
+            </a:endParaRPr>
           </a:p>
           <a:p>
             <a:pPr algn="ctr"/>
@@ -14299,6 +13810,11 @@
               </a:rPr>
               <a:t>MSMEs in India</a:t>
             </a:r>
+            <a:endParaRPr sz="900">
+              <a:solidFill>
+                <a:srgbClr val="CCCCCC"/>
+              </a:solidFill>
+            </a:endParaRPr>
           </a:p>
         </p:txBody>
       </p:sp>
@@ -14350,6 +13866,11 @@
               </a:rPr>
               <a:t>28K+</a:t>
             </a:r>
+            <a:endParaRPr sz="2400" b="1">
+              <a:solidFill>
+                <a:srgbClr val="FF6B35"/>
+              </a:solidFill>
+            </a:endParaRPr>
           </a:p>
           <a:p>
             <a:pPr algn="ctr"/>
@@ -14361,6 +13882,11 @@
               </a:rPr>
               <a:t>BIS Standards</a:t>
             </a:r>
+            <a:endParaRPr sz="900">
+              <a:solidFill>
+                <a:srgbClr val="CCCCCC"/>
+              </a:solidFill>
+            </a:endParaRPr>
           </a:p>
         </p:txBody>
       </p:sp>
@@ -14412,6 +13938,11 @@
               </a:rPr>
               <a:t>2.5L Cr</a:t>
             </a:r>
+            <a:endParaRPr sz="2400" b="1">
+              <a:solidFill>
+                <a:srgbClr val="FF6B35"/>
+              </a:solidFill>
+            </a:endParaRPr>
           </a:p>
           <a:p>
             <a:pPr algn="ctr"/>
@@ -14423,6 +13954,11 @@
               </a:rPr>
               <a:t>Compliance Market</a:t>
             </a:r>
+            <a:endParaRPr sz="900">
+              <a:solidFill>
+                <a:srgbClr val="CCCCCC"/>
+              </a:solidFill>
+            </a:endParaRPr>
           </a:p>
         </p:txBody>
       </p:sp>
@@ -14456,6 +13992,11 @@
               </a:rPr>
               <a:t>Who Benefits?</a:t>
             </a:r>
+            <a:endParaRPr sz="1300" b="1">
+              <a:solidFill>
+                <a:srgbClr val="1A3A6E"/>
+              </a:solidFill>
+            </a:endParaRPr>
           </a:p>
         </p:txBody>
       </p:sp>
@@ -14534,6 +14075,11 @@
               </a:rPr>
               <a:t>MSMEs &amp; Manufacturers</a:t>
             </a:r>
+            <a:endParaRPr sz="1000" b="1">
+              <a:solidFill>
+                <a:srgbClr val="1A3A6E"/>
+              </a:solidFill>
+            </a:endParaRPr>
           </a:p>
           <a:p>
             <a:r>
@@ -14544,6 +14090,11 @@
               </a:rPr>
               <a:t>Quick standards + cert answers</a:t>
             </a:r>
+            <a:endParaRPr sz="900">
+              <a:solidFill>
+                <a:srgbClr val="333333"/>
+              </a:solidFill>
+            </a:endParaRPr>
           </a:p>
         </p:txBody>
       </p:sp>
@@ -14622,6 +14173,11 @@
               </a:rPr>
               <a:t>Construction Companies</a:t>
             </a:r>
+            <a:endParaRPr sz="1000" b="1">
+              <a:solidFill>
+                <a:srgbClr val="1A3A6E"/>
+              </a:solidFill>
+            </a:endParaRPr>
           </a:p>
           <a:p>
             <a:r>
@@ -14632,6 +14188,11 @@
               </a:rPr>
               <a:t>Steel, cement compliance</a:t>
             </a:r>
+            <a:endParaRPr sz="900">
+              <a:solidFill>
+                <a:srgbClr val="333333"/>
+              </a:solidFill>
+            </a:endParaRPr>
           </a:p>
         </p:txBody>
       </p:sp>
@@ -14710,6 +14271,11 @@
               </a:rPr>
               <a:t>Testing Labs</a:t>
             </a:r>
+            <a:endParaRPr sz="1000" b="1">
+              <a:solidFill>
+                <a:srgbClr val="1A3A6E"/>
+              </a:solidFill>
+            </a:endParaRPr>
           </a:p>
           <a:p>
             <a:r>
@@ -14720,6 +14286,11 @@
               </a:rPr>
               <a:t>Reference standards</a:t>
             </a:r>
+            <a:endParaRPr sz="900">
+              <a:solidFill>
+                <a:srgbClr val="333333"/>
+              </a:solidFill>
+            </a:endParaRPr>
           </a:p>
         </p:txBody>
       </p:sp>
@@ -14798,6 +14369,11 @@
               </a:rPr>
               <a:t>Quality Managers</a:t>
             </a:r>
+            <a:endParaRPr sz="1000" b="1">
+              <a:solidFill>
+                <a:srgbClr val="1A3A6E"/>
+              </a:solidFill>
+            </a:endParaRPr>
           </a:p>
           <a:p>
             <a:r>
@@ -14808,6 +14384,11 @@
               </a:rPr>
               <a:t>Stay updated via auto-fetch</a:t>
             </a:r>
+            <a:endParaRPr sz="900">
+              <a:solidFill>
+                <a:srgbClr val="333333"/>
+              </a:solidFill>
+            </a:endParaRPr>
           </a:p>
         </p:txBody>
       </p:sp>
@@ -14841,6 +14422,11 @@
               </a:rPr>
               <a:t>Development Roadmap</a:t>
             </a:r>
+            <a:endParaRPr sz="1600" b="1">
+              <a:solidFill>
+                <a:srgbClr val="1A3A6E"/>
+              </a:solidFill>
+            </a:endParaRPr>
           </a:p>
         </p:txBody>
       </p:sp>
@@ -14892,6 +14478,11 @@
               </a:rPr>
               <a:t>DONE</a:t>
             </a:r>
+            <a:endParaRPr sz="800" b="1">
+              <a:solidFill>
+                <a:srgbClr val="FFFFFF"/>
+              </a:solidFill>
+            </a:endParaRPr>
           </a:p>
         </p:txBody>
       </p:sp>
@@ -14925,6 +14516,11 @@
               </a:rPr>
               <a:t>MVP - 28 standards, 22 languages, RAG, auth</a:t>
             </a:r>
+            <a:endParaRPr sz="1000">
+              <a:solidFill>
+                <a:srgbClr val="333333"/>
+              </a:solidFill>
+            </a:endParaRPr>
           </a:p>
         </p:txBody>
       </p:sp>
@@ -14976,6 +14572,11 @@
               </a:rPr>
               <a:t>NOW</a:t>
             </a:r>
+            <a:endParaRPr sz="800" b="1">
+              <a:solidFill>
+                <a:srgbClr val="FFFFFF"/>
+              </a:solidFill>
+            </a:endParaRPr>
           </a:p>
         </p:txBody>
       </p:sp>
@@ -15009,6 +14610,11 @@
               </a:rPr>
               <a:t>Scale - All 28,000+ standards, PDF viewer, WhatsApp bot</a:t>
             </a:r>
+            <a:endParaRPr sz="1000">
+              <a:solidFill>
+                <a:srgbClr val="333333"/>
+              </a:solidFill>
+            </a:endParaRPr>
           </a:p>
         </p:txBody>
       </p:sp>
@@ -15060,6 +14666,11 @@
               </a:rPr>
               <a:t>FUTURE</a:t>
             </a:r>
+            <a:endParaRPr sz="800" b="1">
+              <a:solidFill>
+                <a:srgbClr val="FFFFFF"/>
+              </a:solidFill>
+            </a:endParaRPr>
           </a:p>
         </p:txBody>
       </p:sp>
@@ -15093,6 +14704,11 @@
               </a:rPr>
               <a:t>Production - PostgreSQL, mobile app, voice, BIS integration</a:t>
             </a:r>
+            <a:endParaRPr sz="1000">
+              <a:solidFill>
+                <a:srgbClr val="333333"/>
+              </a:solidFill>
+            </a:endParaRPr>
           </a:p>
         </p:txBody>
       </p:sp>
@@ -15126,6 +14742,11 @@
               </a:rPr>
               <a:t>Business Model</a:t>
             </a:r>
+            <a:endParaRPr sz="1300" b="1">
+              <a:solidFill>
+                <a:srgbClr val="1A3A6E"/>
+              </a:solidFill>
+            </a:endParaRPr>
           </a:p>
         </p:txBody>
       </p:sp>
@@ -15167,7 +14788,7 @@
           </a:fontRef>
         </p:style>
         <p:txBody>
-          <a:bodyPr rtlCol="0" anchor="ctr" wrap="square" lIns="127000" tIns="76200"/>
+          <a:bodyPr wrap="square" lIns="127000" tIns="76200" rtlCol="0" anchor="ctr"/>
           <a:lstStyle/>
           <a:p>
             <a:pPr algn="ctr">
@@ -15199,6 +14820,11 @@
               </a:rPr>
               <a:t> 10 queries/day for individuals</a:t>
             </a:r>
+            <a:endParaRPr sz="1000">
+              <a:solidFill>
+                <a:srgbClr val="333333"/>
+              </a:solidFill>
+            </a:endParaRPr>
           </a:p>
           <a:p>
             <a:pPr>
@@ -15230,6 +14856,11 @@
               </a:rPr>
               <a:t> Unlimited + compliance calendar</a:t>
             </a:r>
+            <a:endParaRPr sz="1000">
+              <a:solidFill>
+                <a:srgbClr val="333333"/>
+              </a:solidFill>
+            </a:endParaRPr>
           </a:p>
           <a:p>
             <a:pPr>
@@ -15261,6 +14892,11 @@
               </a:rPr>
               <a:t> API + bulk check + support</a:t>
             </a:r>
+            <a:endParaRPr sz="1000">
+              <a:solidFill>
+                <a:srgbClr val="333333"/>
+              </a:solidFill>
+            </a:endParaRPr>
           </a:p>
           <a:p>
             <a:pPr>
@@ -15292,6 +14928,11 @@
               </a:rPr>
               <a:t> Official data provider</a:t>
             </a:r>
+            <a:endParaRPr sz="1000">
+              <a:solidFill>
+                <a:srgbClr val="333333"/>
+              </a:solidFill>
+            </a:endParaRPr>
           </a:p>
           <a:p>
             <a:pPr>
@@ -15323,6 +14964,11 @@
               </a:rPr>
               <a:t> MSME Samadhaan scheme</a:t>
             </a:r>
+            <a:endParaRPr sz="1000">
+              <a:solidFill>
+                <a:srgbClr val="333333"/>
+              </a:solidFill>
+            </a:endParaRPr>
           </a:p>
         </p:txBody>
       </p:sp>
@@ -15335,7 +14981,7 @@
 </file>
 
 <file path=ppt/slides/slide7.xml><?xml version="1.0" encoding="utf-8"?>
-<p:sld xmlns:a="http://schemas.openxmlformats.org/drawingml/2006/main" xmlns:p="http://schemas.openxmlformats.org/presentationml/2006/main" xmlns:r="http://schemas.openxmlformats.org/officeDocument/2006/relationships">
+<p:sld xmlns:a="http://schemas.openxmlformats.org/drawingml/2006/main" xmlns:r="http://schemas.openxmlformats.org/officeDocument/2006/relationships" xmlns:p="http://schemas.openxmlformats.org/presentationml/2006/main">
   <p:cSld>
     <p:spTree>
       <p:nvGrpSpPr>
@@ -15472,6 +15118,11 @@
               </a:rPr>
               <a:t>YOU</a:t>
             </a:r>
+            <a:endParaRPr sz="4800" b="1">
+              <a:solidFill>
+                <a:srgbClr val="FF6B35"/>
+              </a:solidFill>
+            </a:endParaRPr>
           </a:p>
         </p:txBody>
       </p:sp>
@@ -15550,6 +15201,11 @@
               <a:t>ManakMitra - Making BIS Standards Accessible
 to Every Indian Manufacturer</a:t>
             </a:r>
+            <a:endParaRPr sz="1800">
+              <a:solidFill>
+                <a:srgbClr val="CCCCCC"/>
+              </a:solidFill>
+            </a:endParaRPr>
           </a:p>
         </p:txBody>
       </p:sp>
@@ -15629,6 +15285,11 @@
               </a:rPr>
               <a:t>Pavan Kumar</a:t>
             </a:r>
+            <a:endParaRPr sz="1600" b="1">
+              <a:solidFill>
+                <a:srgbClr val="FFFFFF"/>
+              </a:solidFill>
+            </a:endParaRPr>
           </a:p>
         </p:txBody>
       </p:sp>
@@ -15663,6 +15324,11 @@
               </a:rPr>
               <a:t>Team Lead / Full Stack Developer</a:t>
             </a:r>
+            <a:endParaRPr sz="1100">
+              <a:solidFill>
+                <a:srgbClr val="AAAAAA"/>
+              </a:solidFill>
+            </a:endParaRPr>
           </a:p>
         </p:txBody>
       </p:sp>
@@ -15722,6 +15388,11 @@
               </a:rPr>
               <a:t>manakmitra-frontend.vercel.app</a:t>
             </a:r>
+            <a:endParaRPr sz="1400" b="1">
+              <a:solidFill>
+                <a:srgbClr val="FF6B35"/>
+              </a:solidFill>
+            </a:endParaRPr>
           </a:p>
         </p:txBody>
       </p:sp>
@@ -15773,6 +15444,11 @@
               </a:rPr>
               <a:t>SIH</a:t>
             </a:r>
+            <a:endParaRPr sz="1200" b="1">
+              <a:solidFill>
+                <a:srgbClr val="FFFFFF"/>
+              </a:solidFill>
+            </a:endParaRPr>
           </a:p>
         </p:txBody>
       </p:sp>
@@ -15808,6 +15484,11 @@
               <a:t>SMART INDIA
 HACKATHON 2026</a:t>
             </a:r>
+            <a:endParaRPr sz="1100" b="1">
+              <a:solidFill>
+                <a:srgbClr val="CCCCCC"/>
+              </a:solidFill>
+            </a:endParaRPr>
           </a:p>
         </p:txBody>
       </p:sp>
@@ -15841,6 +15522,11 @@
               </a:rPr>
               <a:t>@SIH Idea submission - Team Resonant</a:t>
             </a:r>
+            <a:endParaRPr sz="900">
+              <a:solidFill>
+                <a:srgbClr val="666666"/>
+              </a:solidFill>
+            </a:endParaRPr>
           </a:p>
         </p:txBody>
       </p:sp>
@@ -16168,6 +15854,10 @@
       </a:style>
     </a:lnDef>
   </a:objectDefaults>
-  <a:extraClrSchemeLst/>
+  <a:extLst>
+    <a:ext uri="{05A4C25C-085E-4340-85A3-A5531E510DB2}">
+      <thm15:themeFamily xmlns:thm15="http://schemas.microsoft.com/office/thememl/2012/main" name="Office Theme" id="{62F939B6-93AF-4DB8-9C6B-D6C7DFDC589F}" vid="{4A3C46E8-61CC-4603-A589-7422A47A8E4A}"/>
+    </a:ext>
+  </a:extLst>
 </a:theme>
 </file>